--- a/artifacts/ClinicOS_DesignThinking_Deck.pptx
+++ b/artifacts/ClinicOS_DesignThinking_Deck.pptx
@@ -9696,6 +9696,1065 @@
 </file>
 
 <file path=ppt/slides/slide18.xml><?xml version="1.0" encoding="utf-8"?>
+<p:sld xmlns:a="http://schemas.openxmlformats.org/drawingml/2006/main" xmlns:p="http://schemas.openxmlformats.org/presentationml/2006/main" xmlns:r="http://schemas.openxmlformats.org/officeDocument/2006/relationships">
+  <p:cSld>
+    <p:spTree>
+      <p:nvGrpSpPr>
+        <p:cNvPr id="1" name=""/>
+        <p:cNvGrpSpPr/>
+        <p:nvPr/>
+      </p:nvGrpSpPr>
+      <p:grpSpPr/>
+      <p:sp>
+        <p:nvSpPr>
+          <p:cNvPr id="2" name="Shape 0"/>
+          <p:cNvSpPr/>
+          <p:nvPr/>
+        </p:nvSpPr>
+        <p:spPr>
+          <a:xfrm>
+            <a:off x="0" y="0"/>
+            <a:ext cx="12191695" cy="6858000"/>
+          </a:xfrm>
+          <a:prstGeom prst="rect">
+            <a:avLst/>
+          </a:prstGeom>
+          <a:solidFill>
+            <a:srgbClr val="FFFFFF"/>
+          </a:solidFill>
+          <a:ln w="12700">
+            <a:solidFill>
+              <a:srgbClr val="FFFFFF"/>
+            </a:solidFill>
+            <a:prstDash val="solid"/>
+          </a:ln>
+        </p:spPr>
+        <p:txBody>
+          <a:bodyPr/>
+          <a:p/>
+        </p:txBody>
+      </p:sp>
+      <p:sp>
+        <p:nvSpPr>
+          <p:cNvPr id="3" name="Text 1"/>
+          <p:cNvSpPr txBox="1"/>
+          <p:nvPr/>
+        </p:nvSpPr>
+        <p:spPr>
+          <a:xfrm>
+            <a:off x="640080" y="475488"/>
+            <a:ext cx="7315200" cy="256032"/>
+          </a:xfrm>
+          <a:prstGeom prst="rect">
+            <a:avLst/>
+          </a:prstGeom>
+          <a:noFill/>
+          <a:ln/>
+        </p:spPr>
+        <p:txBody>
+          <a:bodyPr wrap="square" lIns="0" tIns="0" rIns="0" bIns="0" rtlCol="0" anchor="ctr"/>
+          <a:lstStyle/>
+          <a:p>
+            <a:pPr indent="0" marL="0">
+              <a:buNone/>
+            </a:pPr>
+            <a:r>
+              <a:rPr lang="en-US" sz="1100" b="1" spc="240" kern="0" dirty="0">
+                <a:solidFill>
+                  <a:srgbClr val="0E6E6B"/>
+                </a:solidFill>
+                <a:latin typeface="Calibri" pitchFamily="34" charset="0"/>
+                <a:ea typeface="Calibri" pitchFamily="34" charset="-122"/>
+                <a:cs typeface="Calibri" pitchFamily="34" charset="-120"/>
+              </a:rPr>
+              <a:t>SCALE</a:t>
+            </a:r>
+            <a:endParaRPr lang="en-US" sz="1100" dirty="0"/>
+          </a:p>
+        </p:txBody>
+      </p:sp>
+      <p:sp>
+        <p:nvSpPr>
+          <p:cNvPr id="4" name="Text 2"/>
+          <p:cNvSpPr txBox="1"/>
+          <p:nvPr/>
+        </p:nvSpPr>
+        <p:spPr>
+          <a:xfrm>
+            <a:off x="640080" y="822960"/>
+            <a:ext cx="9509760" cy="777240"/>
+          </a:xfrm>
+          <a:prstGeom prst="rect">
+            <a:avLst/>
+          </a:prstGeom>
+          <a:noFill/>
+          <a:ln/>
+        </p:spPr>
+        <p:txBody>
+          <a:bodyPr wrap="square" lIns="0" tIns="0" rIns="0" bIns="0" rtlCol="0" anchor="ctr"/>
+          <a:lstStyle/>
+          <a:p>
+            <a:pPr indent="0" marL="0">
+              <a:buNone/>
+            </a:pPr>
+            <a:r>
+              <a:rPr lang="en-US" sz="3400" b="1" dirty="0">
+                <a:solidFill>
+                  <a:srgbClr val="0B2B2E"/>
+                </a:solidFill>
+                <a:latin typeface="Cambria" pitchFamily="34" charset="0"/>
+                <a:ea typeface="Cambria" pitchFamily="34" charset="-122"/>
+                <a:cs typeface="Cambria" pitchFamily="34" charset="-120"/>
+              </a:rPr>
+              <a:t>One room first. Built for the country.</a:t>
+            </a:r>
+            <a:endParaRPr lang="en-US" sz="3400" dirty="0"/>
+          </a:p>
+        </p:txBody>
+      </p:sp>
+      <p:sp>
+        <p:nvSpPr>
+          <p:cNvPr id="5" name="Text 3"/>
+          <p:cNvSpPr txBox="1"/>
+          <p:nvPr/>
+        </p:nvSpPr>
+        <p:spPr>
+          <a:xfrm>
+            <a:off x="7423099" y="493776"/>
+            <a:ext cx="2788920" cy="256032"/>
+          </a:xfrm>
+          <a:prstGeom prst="rect">
+            <a:avLst/>
+          </a:prstGeom>
+          <a:noFill/>
+          <a:ln/>
+        </p:spPr>
+        <p:txBody>
+          <a:bodyPr wrap="square" lIns="0" tIns="0" rIns="0" bIns="0" rtlCol="0" anchor="ctr"/>
+          <a:lstStyle/>
+          <a:p>
+            <a:pPr algn="r" indent="0" marL="0">
+              <a:buNone/>
+            </a:pPr>
+            <a:r>
+              <a:rPr lang="en-US" sz="1000" b="1" spc="180" kern="0" dirty="0">
+                <a:solidFill>
+                  <a:srgbClr val="8B9C9D"/>
+                </a:solidFill>
+                <a:latin typeface="Calibri" pitchFamily="34" charset="0"/>
+                <a:ea typeface="Calibri" pitchFamily="34" charset="-122"/>
+                <a:cs typeface="Calibri" pitchFamily="34" charset="-120"/>
+              </a:rPr>
+              <a:t>SCALE</a:t>
+            </a:r>
+            <a:endParaRPr lang="en-US" sz="1000" dirty="0"/>
+          </a:p>
+        </p:txBody>
+      </p:sp>
+      <p:sp>
+        <p:nvSpPr>
+          <p:cNvPr id="6" name="Shape 4"/>
+          <p:cNvSpPr/>
+          <p:nvPr/>
+        </p:nvSpPr>
+        <p:spPr>
+          <a:xfrm>
+            <a:off x="10349179" y="548640"/>
+            <a:ext cx="141732" cy="141732"/>
+          </a:xfrm>
+          <a:prstGeom prst="ellipse">
+            <a:avLst/>
+          </a:prstGeom>
+          <a:solidFill>
+            <a:srgbClr val="DFEAE8"/>
+          </a:solidFill>
+          <a:ln/>
+        </p:spPr>
+        <p:txBody>
+          <a:bodyPr/>
+          <a:p/>
+        </p:txBody>
+      </p:sp>
+      <p:sp>
+        <p:nvSpPr>
+          <p:cNvPr id="7" name="Shape 5"/>
+          <p:cNvSpPr/>
+          <p:nvPr/>
+        </p:nvSpPr>
+        <p:spPr>
+          <a:xfrm>
+            <a:off x="10614355" y="548640"/>
+            <a:ext cx="141732" cy="141732"/>
+          </a:xfrm>
+          <a:prstGeom prst="ellipse">
+            <a:avLst/>
+          </a:prstGeom>
+          <a:solidFill>
+            <a:srgbClr val="C9821F"/>
+          </a:solidFill>
+          <a:ln/>
+        </p:spPr>
+        <p:txBody>
+          <a:bodyPr/>
+          <a:p/>
+        </p:txBody>
+      </p:sp>
+      <p:sp>
+        <p:nvSpPr>
+          <p:cNvPr id="8" name="Shape 6"/>
+          <p:cNvSpPr/>
+          <p:nvPr/>
+        </p:nvSpPr>
+        <p:spPr>
+          <a:xfrm>
+            <a:off x="10879531" y="548640"/>
+            <a:ext cx="141732" cy="141732"/>
+          </a:xfrm>
+          <a:prstGeom prst="ellipse">
+            <a:avLst/>
+          </a:prstGeom>
+          <a:solidFill>
+            <a:srgbClr val="DFEAE8"/>
+          </a:solidFill>
+          <a:ln/>
+        </p:spPr>
+        <p:txBody>
+          <a:bodyPr/>
+          <a:p/>
+        </p:txBody>
+      </p:sp>
+      <p:sp>
+        <p:nvSpPr>
+          <p:cNvPr id="9" name="Shape 7"/>
+          <p:cNvSpPr/>
+          <p:nvPr/>
+        </p:nvSpPr>
+        <p:spPr>
+          <a:xfrm>
+            <a:off x="11144707" y="548640"/>
+            <a:ext cx="141732" cy="141732"/>
+          </a:xfrm>
+          <a:prstGeom prst="ellipse">
+            <a:avLst/>
+          </a:prstGeom>
+          <a:solidFill>
+            <a:srgbClr val="DFEAE8"/>
+          </a:solidFill>
+          <a:ln/>
+        </p:spPr>
+        <p:txBody>
+          <a:bodyPr/>
+          <a:p/>
+        </p:txBody>
+      </p:sp>
+      <p:sp>
+        <p:nvSpPr>
+          <p:cNvPr id="10" name="Shape 8"/>
+          <p:cNvSpPr/>
+          <p:nvPr/>
+        </p:nvSpPr>
+        <p:spPr>
+          <a:xfrm>
+            <a:off x="11409883" y="548640"/>
+            <a:ext cx="141732" cy="141732"/>
+          </a:xfrm>
+          <a:prstGeom prst="ellipse">
+            <a:avLst/>
+          </a:prstGeom>
+          <a:solidFill>
+            <a:srgbClr val="DFEAE8"/>
+          </a:solidFill>
+          <a:ln/>
+        </p:spPr>
+        <p:txBody>
+          <a:bodyPr/>
+          <a:p/>
+        </p:txBody>
+      </p:sp>
+      <p:sp>
+        <p:nvSpPr>
+          <p:cNvPr id="11" name="Text 9"/>
+          <p:cNvSpPr txBox="1"/>
+          <p:nvPr/>
+        </p:nvSpPr>
+        <p:spPr>
+          <a:xfrm>
+            <a:off x="640080" y="1664208"/>
+            <a:ext cx="9601200" cy="329184"/>
+          </a:xfrm>
+          <a:prstGeom prst="rect">
+            <a:avLst/>
+          </a:prstGeom>
+          <a:noFill/>
+          <a:ln/>
+        </p:spPr>
+        <p:txBody>
+          <a:bodyPr wrap="square" lIns="0" tIns="0" rIns="0" bIns="0" rtlCol="0" anchor="ctr"/>
+          <a:lstStyle/>
+          <a:p>
+            <a:pPr indent="0" marL="0">
+              <a:buNone/>
+            </a:pPr>
+            <a:r>
+              <a:rPr lang="en-US" sz="1400" dirty="0">
+                <a:solidFill>
+                  <a:srgbClr val="56696A"/>
+                </a:solidFill>
+                <a:latin typeface="Calibri" pitchFamily="34" charset="0"/>
+                <a:ea typeface="Calibri" pitchFamily="34" charset="-122"/>
+                <a:cs typeface="Calibri" pitchFamily="34" charset="-120"/>
+              </a:rPr>
+              <a:t>Krishnanagar is the evidence. ClinicOS is built by Varaxis to scale — nationally, then internationally.</a:t>
+            </a:r>
+            <a:endParaRPr lang="en-US" sz="1400" dirty="0"/>
+          </a:p>
+        </p:txBody>
+      </p:sp>
+      <p:sp>
+        <p:nvSpPr>
+          <p:cNvPr id="12" name="Shape 10"/>
+          <p:cNvSpPr/>
+          <p:nvPr/>
+        </p:nvSpPr>
+        <p:spPr>
+          <a:xfrm>
+            <a:off x="640080" y="2212848"/>
+            <a:ext cx="5346040" cy="1664208"/>
+          </a:xfrm>
+          <a:prstGeom prst="roundRect">
+            <a:avLst>
+              <a:gd name="adj" fmla="val 3846"/>
+            </a:avLst>
+          </a:prstGeom>
+          <a:solidFill>
+            <a:srgbClr val="FFFFFF"/>
+          </a:solidFill>
+          <a:ln w="12700">
+            <a:solidFill>
+              <a:srgbClr val="DFEAE8"/>
+            </a:solidFill>
+            <a:prstDash val="solid"/>
+          </a:ln>
+          <a:effectLst>
+            <a:outerShdw sx="100000" sy="100000" kx="0" ky="0" algn="bl" rotWithShape="0" blurRad="152400" dist="25400" dir="5400000">
+              <a:srgbClr val="0B2B2E">
+                <a:alpha val="9000"/>
+              </a:srgbClr>
+            </a:outerShdw>
+          </a:effectLst>
+        </p:spPr>
+        <p:txBody>
+          <a:bodyPr/>
+          <a:p/>
+        </p:txBody>
+      </p:sp>
+      <p:sp>
+        <p:nvSpPr>
+          <p:cNvPr id="13" name="Shape 11"/>
+          <p:cNvSpPr/>
+          <p:nvPr/>
+        </p:nvSpPr>
+        <p:spPr>
+          <a:xfrm>
+            <a:off x="932688" y="2487168"/>
+            <a:ext cx="475488" cy="475488"/>
+          </a:xfrm>
+          <a:prstGeom prst="roundRect">
+            <a:avLst>
+              <a:gd name="adj" fmla="val 23077"/>
+            </a:avLst>
+          </a:prstGeom>
+          <a:solidFill>
+            <a:srgbClr val="0E6E6B"/>
+          </a:solidFill>
+          <a:ln/>
+        </p:spPr>
+        <p:txBody>
+          <a:bodyPr/>
+          <a:p/>
+        </p:txBody>
+      </p:sp>
+      <p:sp>
+        <p:nvSpPr>
+          <p:cNvPr id="14" name="Text 12"/>
+          <p:cNvSpPr txBox="1"/>
+          <p:nvPr/>
+        </p:nvSpPr>
+        <p:spPr>
+          <a:xfrm>
+            <a:off x="932688" y="2487168"/>
+            <a:ext cx="475488" cy="475488"/>
+          </a:xfrm>
+          <a:prstGeom prst="rect">
+            <a:avLst/>
+          </a:prstGeom>
+          <a:noFill/>
+          <a:ln/>
+        </p:spPr>
+        <p:txBody>
+          <a:bodyPr wrap="square" lIns="0" tIns="0" rIns="0" bIns="0" rtlCol="0" anchor="ctr"/>
+          <a:lstStyle/>
+          <a:p>
+            <a:pPr algn="ctr" indent="0" marL="0">
+              <a:buNone/>
+            </a:pPr>
+            <a:r>
+              <a:rPr lang="en-US" sz="1300" b="1" dirty="0">
+                <a:solidFill>
+                  <a:srgbClr val="FFFFFF"/>
+                </a:solidFill>
+                <a:latin typeface="Calibri" pitchFamily="34" charset="0"/>
+                <a:ea typeface="Calibri" pitchFamily="34" charset="-122"/>
+                <a:cs typeface="Calibri" pitchFamily="34" charset="-120"/>
+              </a:rPr>
+              <a:t>01</a:t>
+            </a:r>
+            <a:endParaRPr lang="en-US" sz="1300" dirty="0"/>
+          </a:p>
+        </p:txBody>
+      </p:sp>
+      <p:sp>
+        <p:nvSpPr>
+          <p:cNvPr id="15" name="Text 13"/>
+          <p:cNvSpPr txBox="1"/>
+          <p:nvPr/>
+        </p:nvSpPr>
+        <p:spPr>
+          <a:xfrm>
+            <a:off x="1572768" y="2505456"/>
+            <a:ext cx="4111600" cy="310896"/>
+          </a:xfrm>
+          <a:prstGeom prst="rect">
+            <a:avLst/>
+          </a:prstGeom>
+          <a:noFill/>
+          <a:ln/>
+        </p:spPr>
+        <p:txBody>
+          <a:bodyPr wrap="square" lIns="0" tIns="0" rIns="0" bIns="0" rtlCol="0" anchor="ctr"/>
+          <a:lstStyle/>
+          <a:p>
+            <a:pPr indent="0" marL="0">
+              <a:buNone/>
+            </a:pPr>
+            <a:r>
+              <a:rPr lang="en-US" sz="1600" b="1" dirty="0">
+                <a:solidFill>
+                  <a:srgbClr val="0B2B2E"/>
+                </a:solidFill>
+                <a:latin typeface="Calibri" pitchFamily="34" charset="0"/>
+                <a:ea typeface="Calibri" pitchFamily="34" charset="-122"/>
+                <a:cs typeface="Calibri" pitchFamily="34" charset="-120"/>
+              </a:rPr>
+              <a:t>Accounts and roles</a:t>
+            </a:r>
+            <a:endParaRPr lang="en-US" sz="1600" dirty="0"/>
+          </a:p>
+        </p:txBody>
+      </p:sp>
+      <p:sp>
+        <p:nvSpPr>
+          <p:cNvPr id="16" name="Text 14"/>
+          <p:cNvSpPr txBox="1"/>
+          <p:nvPr/>
+        </p:nvSpPr>
+        <p:spPr>
+          <a:xfrm>
+            <a:off x="1572768" y="2889504"/>
+            <a:ext cx="4111600" cy="777240"/>
+          </a:xfrm>
+          <a:prstGeom prst="rect">
+            <a:avLst/>
+          </a:prstGeom>
+          <a:noFill/>
+          <a:ln/>
+        </p:spPr>
+        <p:txBody>
+          <a:bodyPr wrap="square" lIns="0" tIns="0" rIns="0" bIns="0" rtlCol="0" anchor="ctr"/>
+          <a:lstStyle/>
+          <a:p>
+            <a:pPr indent="0" marL="0">
+              <a:lnSpc>
+                <a:spcPts val="1800"/>
+              </a:lnSpc>
+              <a:buNone/>
+            </a:pPr>
+            <a:r>
+              <a:rPr lang="en-US" sz="1250" dirty="0">
+                <a:solidFill>
+                  <a:srgbClr val="56696A"/>
+                </a:solidFill>
+                <a:latin typeface="Calibri" pitchFamily="34" charset="0"/>
+                <a:ea typeface="Calibri" pitchFamily="34" charset="-122"/>
+                <a:cs typeface="Calibri" pitchFamily="34" charset="-120"/>
+              </a:rPr>
+              <a:t>Doctor, front desk and clinic admin — checked on every request, not just hidden behind a menu.</a:t>
+            </a:r>
+            <a:endParaRPr lang="en-US" sz="1250" dirty="0"/>
+          </a:p>
+        </p:txBody>
+      </p:sp>
+      <p:sp>
+        <p:nvSpPr>
+          <p:cNvPr id="17" name="Shape 15"/>
+          <p:cNvSpPr/>
+          <p:nvPr/>
+        </p:nvSpPr>
+        <p:spPr>
+          <a:xfrm>
+            <a:off x="6205576" y="2212848"/>
+            <a:ext cx="5346040" cy="1664208"/>
+          </a:xfrm>
+          <a:prstGeom prst="roundRect">
+            <a:avLst>
+              <a:gd name="adj" fmla="val 3846"/>
+            </a:avLst>
+          </a:prstGeom>
+          <a:solidFill>
+            <a:srgbClr val="FFFFFF"/>
+          </a:solidFill>
+          <a:ln w="12700">
+            <a:solidFill>
+              <a:srgbClr val="DFEAE8"/>
+            </a:solidFill>
+            <a:prstDash val="solid"/>
+          </a:ln>
+          <a:effectLst>
+            <a:outerShdw sx="100000" sy="100000" kx="0" ky="0" algn="bl" rotWithShape="0" blurRad="152400" dist="25400" dir="5400000">
+              <a:srgbClr val="0B2B2E">
+                <a:alpha val="9000"/>
+              </a:srgbClr>
+            </a:outerShdw>
+          </a:effectLst>
+        </p:spPr>
+        <p:txBody>
+          <a:bodyPr/>
+          <a:p/>
+        </p:txBody>
+      </p:sp>
+      <p:sp>
+        <p:nvSpPr>
+          <p:cNvPr id="18" name="Shape 16"/>
+          <p:cNvSpPr/>
+          <p:nvPr/>
+        </p:nvSpPr>
+        <p:spPr>
+          <a:xfrm>
+            <a:off x="6498184" y="2487168"/>
+            <a:ext cx="475488" cy="475488"/>
+          </a:xfrm>
+          <a:prstGeom prst="roundRect">
+            <a:avLst>
+              <a:gd name="adj" fmla="val 23077"/>
+            </a:avLst>
+          </a:prstGeom>
+          <a:solidFill>
+            <a:srgbClr val="C9821F"/>
+          </a:solidFill>
+          <a:ln/>
+        </p:spPr>
+        <p:txBody>
+          <a:bodyPr/>
+          <a:p/>
+        </p:txBody>
+      </p:sp>
+      <p:sp>
+        <p:nvSpPr>
+          <p:cNvPr id="19" name="Text 17"/>
+          <p:cNvSpPr txBox="1"/>
+          <p:nvPr/>
+        </p:nvSpPr>
+        <p:spPr>
+          <a:xfrm>
+            <a:off x="6498184" y="2487168"/>
+            <a:ext cx="475488" cy="475488"/>
+          </a:xfrm>
+          <a:prstGeom prst="rect">
+            <a:avLst/>
+          </a:prstGeom>
+          <a:noFill/>
+          <a:ln/>
+        </p:spPr>
+        <p:txBody>
+          <a:bodyPr wrap="square" lIns="0" tIns="0" rIns="0" bIns="0" rtlCol="0" anchor="ctr"/>
+          <a:lstStyle/>
+          <a:p>
+            <a:pPr algn="ctr" indent="0" marL="0">
+              <a:buNone/>
+            </a:pPr>
+            <a:r>
+              <a:rPr lang="en-US" sz="1300" b="1" dirty="0">
+                <a:solidFill>
+                  <a:srgbClr val="FFFFFF"/>
+                </a:solidFill>
+                <a:latin typeface="Calibri" pitchFamily="34" charset="0"/>
+                <a:ea typeface="Calibri" pitchFamily="34" charset="-122"/>
+                <a:cs typeface="Calibri" pitchFamily="34" charset="-120"/>
+              </a:rPr>
+              <a:t>02</a:t>
+            </a:r>
+            <a:endParaRPr lang="en-US" sz="1300" dirty="0"/>
+          </a:p>
+        </p:txBody>
+      </p:sp>
+      <p:sp>
+        <p:nvSpPr>
+          <p:cNvPr id="20" name="Text 18"/>
+          <p:cNvSpPr txBox="1"/>
+          <p:nvPr/>
+        </p:nvSpPr>
+        <p:spPr>
+          <a:xfrm>
+            <a:off x="7138264" y="2505456"/>
+            <a:ext cx="4111600" cy="310896"/>
+          </a:xfrm>
+          <a:prstGeom prst="rect">
+            <a:avLst/>
+          </a:prstGeom>
+          <a:noFill/>
+          <a:ln/>
+        </p:spPr>
+        <p:txBody>
+          <a:bodyPr wrap="square" lIns="0" tIns="0" rIns="0" bIns="0" rtlCol="0" anchor="ctr"/>
+          <a:lstStyle/>
+          <a:p>
+            <a:pPr indent="0" marL="0">
+              <a:buNone/>
+            </a:pPr>
+            <a:r>
+              <a:rPr lang="en-US" sz="1600" b="1" dirty="0">
+                <a:solidFill>
+                  <a:srgbClr val="0B2B2E"/>
+                </a:solidFill>
+                <a:latin typeface="Calibri" pitchFamily="34" charset="0"/>
+                <a:ea typeface="Calibri" pitchFamily="34" charset="-122"/>
+                <a:cs typeface="Calibri" pitchFamily="34" charset="-120"/>
+              </a:rPr>
+              <a:t>A front desk that runs the day</a:t>
+            </a:r>
+            <a:endParaRPr lang="en-US" sz="1600" dirty="0"/>
+          </a:p>
+        </p:txBody>
+      </p:sp>
+      <p:sp>
+        <p:nvSpPr>
+          <p:cNvPr id="21" name="Text 19"/>
+          <p:cNvSpPr txBox="1"/>
+          <p:nvPr/>
+        </p:nvSpPr>
+        <p:spPr>
+          <a:xfrm>
+            <a:off x="7138264" y="2889504"/>
+            <a:ext cx="4111600" cy="777240"/>
+          </a:xfrm>
+          <a:prstGeom prst="rect">
+            <a:avLst/>
+          </a:prstGeom>
+          <a:noFill/>
+          <a:ln/>
+        </p:spPr>
+        <p:txBody>
+          <a:bodyPr wrap="square" lIns="0" tIns="0" rIns="0" bIns="0" rtlCol="0" anchor="ctr"/>
+          <a:lstStyle/>
+          <a:p>
+            <a:pPr indent="0" marL="0">
+              <a:lnSpc>
+                <a:spcPts val="1800"/>
+              </a:lnSpc>
+              <a:buNone/>
+            </a:pPr>
+            <a:r>
+              <a:rPr lang="en-US" sz="1250" dirty="0">
+                <a:solidFill>
+                  <a:srgbClr val="56696A"/>
+                </a:solidFill>
+                <a:latin typeface="Calibri" pitchFamily="34" charset="0"/>
+                <a:ea typeface="Calibri" pitchFamily="34" charset="-122"/>
+                <a:cs typeface="Calibri" pitchFamily="34" charset="-120"/>
+              </a:rPr>
+              <a:t>A queue, a day's list and a doctor's worklist, so the clinic works as more than one person.</a:t>
+            </a:r>
+            <a:endParaRPr lang="en-US" sz="1250" dirty="0"/>
+          </a:p>
+        </p:txBody>
+      </p:sp>
+      <p:sp>
+        <p:nvSpPr>
+          <p:cNvPr id="22" name="Shape 20"/>
+          <p:cNvSpPr/>
+          <p:nvPr/>
+        </p:nvSpPr>
+        <p:spPr>
+          <a:xfrm>
+            <a:off x="640080" y="4087368"/>
+            <a:ext cx="5346040" cy="1664208"/>
+          </a:xfrm>
+          <a:prstGeom prst="roundRect">
+            <a:avLst>
+              <a:gd name="adj" fmla="val 3846"/>
+            </a:avLst>
+          </a:prstGeom>
+          <a:solidFill>
+            <a:srgbClr val="FFFFFF"/>
+          </a:solidFill>
+          <a:ln w="12700">
+            <a:solidFill>
+              <a:srgbClr val="DFEAE8"/>
+            </a:solidFill>
+            <a:prstDash val="solid"/>
+          </a:ln>
+          <a:effectLst>
+            <a:outerShdw sx="100000" sy="100000" kx="0" ky="0" algn="bl" rotWithShape="0" blurRad="152400" dist="25400" dir="5400000">
+              <a:srgbClr val="0B2B2E">
+                <a:alpha val="9000"/>
+              </a:srgbClr>
+            </a:outerShdw>
+          </a:effectLst>
+        </p:spPr>
+        <p:txBody>
+          <a:bodyPr/>
+          <a:p/>
+        </p:txBody>
+      </p:sp>
+      <p:sp>
+        <p:nvSpPr>
+          <p:cNvPr id="23" name="Shape 21"/>
+          <p:cNvSpPr/>
+          <p:nvPr/>
+        </p:nvSpPr>
+        <p:spPr>
+          <a:xfrm>
+            <a:off x="932688" y="4361688"/>
+            <a:ext cx="475488" cy="475488"/>
+          </a:xfrm>
+          <a:prstGeom prst="roundRect">
+            <a:avLst>
+              <a:gd name="adj" fmla="val 23077"/>
+            </a:avLst>
+          </a:prstGeom>
+          <a:solidFill>
+            <a:srgbClr val="0E6E6B"/>
+          </a:solidFill>
+          <a:ln/>
+        </p:spPr>
+        <p:txBody>
+          <a:bodyPr/>
+          <a:p/>
+        </p:txBody>
+      </p:sp>
+      <p:sp>
+        <p:nvSpPr>
+          <p:cNvPr id="24" name="Text 22"/>
+          <p:cNvSpPr txBox="1"/>
+          <p:nvPr/>
+        </p:nvSpPr>
+        <p:spPr>
+          <a:xfrm>
+            <a:off x="932688" y="4361688"/>
+            <a:ext cx="475488" cy="475488"/>
+          </a:xfrm>
+          <a:prstGeom prst="rect">
+            <a:avLst/>
+          </a:prstGeom>
+          <a:noFill/>
+          <a:ln/>
+        </p:spPr>
+        <p:txBody>
+          <a:bodyPr wrap="square" lIns="0" tIns="0" rIns="0" bIns="0" rtlCol="0" anchor="ctr"/>
+          <a:lstStyle/>
+          <a:p>
+            <a:pPr algn="ctr" indent="0" marL="0">
+              <a:buNone/>
+            </a:pPr>
+            <a:r>
+              <a:rPr lang="en-US" sz="1300" b="1" dirty="0">
+                <a:solidFill>
+                  <a:srgbClr val="FFFFFF"/>
+                </a:solidFill>
+                <a:latin typeface="Calibri" pitchFamily="34" charset="0"/>
+                <a:ea typeface="Calibri" pitchFamily="34" charset="-122"/>
+                <a:cs typeface="Calibri" pitchFamily="34" charset="-120"/>
+              </a:rPr>
+              <a:t>03</a:t>
+            </a:r>
+            <a:endParaRPr lang="en-US" sz="1300" dirty="0"/>
+          </a:p>
+        </p:txBody>
+      </p:sp>
+      <p:sp>
+        <p:nvSpPr>
+          <p:cNvPr id="25" name="Text 23"/>
+          <p:cNvSpPr txBox="1"/>
+          <p:nvPr/>
+        </p:nvSpPr>
+        <p:spPr>
+          <a:xfrm>
+            <a:off x="1572768" y="4379976"/>
+            <a:ext cx="4111600" cy="310896"/>
+          </a:xfrm>
+          <a:prstGeom prst="rect">
+            <a:avLst/>
+          </a:prstGeom>
+          <a:noFill/>
+          <a:ln/>
+        </p:spPr>
+        <p:txBody>
+          <a:bodyPr wrap="square" lIns="0" tIns="0" rIns="0" bIns="0" rtlCol="0" anchor="ctr"/>
+          <a:lstStyle/>
+          <a:p>
+            <a:pPr indent="0" marL="0">
+              <a:buNone/>
+            </a:pPr>
+            <a:r>
+              <a:rPr lang="en-US" sz="1600" b="1" dirty="0">
+                <a:solidFill>
+                  <a:srgbClr val="0B2B2E"/>
+                </a:solidFill>
+                <a:latin typeface="Calibri" pitchFamily="34" charset="0"/>
+                <a:ea typeface="Calibri" pitchFamily="34" charset="-122"/>
+                <a:cs typeface="Calibri" pitchFamily="34" charset="-120"/>
+              </a:rPr>
+              <a:t>An activity log</a:t>
+            </a:r>
+            <a:endParaRPr lang="en-US" sz="1600" dirty="0"/>
+          </a:p>
+        </p:txBody>
+      </p:sp>
+      <p:sp>
+        <p:nvSpPr>
+          <p:cNvPr id="26" name="Text 24"/>
+          <p:cNvSpPr txBox="1"/>
+          <p:nvPr/>
+        </p:nvSpPr>
+        <p:spPr>
+          <a:xfrm>
+            <a:off x="1572768" y="4764024"/>
+            <a:ext cx="4111600" cy="777240"/>
+          </a:xfrm>
+          <a:prstGeom prst="rect">
+            <a:avLst/>
+          </a:prstGeom>
+          <a:noFill/>
+          <a:ln/>
+        </p:spPr>
+        <p:txBody>
+          <a:bodyPr wrap="square" lIns="0" tIns="0" rIns="0" bIns="0" rtlCol="0" anchor="ctr"/>
+          <a:lstStyle/>
+          <a:p>
+            <a:pPr indent="0" marL="0">
+              <a:lnSpc>
+                <a:spcPts val="1800"/>
+              </a:lnSpc>
+              <a:buNone/>
+            </a:pPr>
+            <a:r>
+              <a:rPr lang="en-US" sz="1250" dirty="0">
+                <a:solidFill>
+                  <a:srgbClr val="56696A"/>
+                </a:solidFill>
+                <a:latin typeface="Calibri" pitchFamily="34" charset="0"/>
+                <a:ea typeface="Calibri" pitchFamily="34" charset="-122"/>
+                <a:cs typeface="Calibri" pitchFamily="34" charset="-120"/>
+              </a:rPr>
+              <a:t>Every account action is recorded, so who did what is always answerable.</a:t>
+            </a:r>
+            <a:endParaRPr lang="en-US" sz="1250" dirty="0"/>
+          </a:p>
+        </p:txBody>
+      </p:sp>
+      <p:sp>
+        <p:nvSpPr>
+          <p:cNvPr id="27" name="Shape 25"/>
+          <p:cNvSpPr/>
+          <p:nvPr/>
+        </p:nvSpPr>
+        <p:spPr>
+          <a:xfrm>
+            <a:off x="6205576" y="4087368"/>
+            <a:ext cx="5346040" cy="1664208"/>
+          </a:xfrm>
+          <a:prstGeom prst="roundRect">
+            <a:avLst>
+              <a:gd name="adj" fmla="val 3846"/>
+            </a:avLst>
+          </a:prstGeom>
+          <a:solidFill>
+            <a:srgbClr val="FFFFFF"/>
+          </a:solidFill>
+          <a:ln w="12700">
+            <a:solidFill>
+              <a:srgbClr val="DFEAE8"/>
+            </a:solidFill>
+            <a:prstDash val="solid"/>
+          </a:ln>
+          <a:effectLst>
+            <a:outerShdw sx="100000" sy="100000" kx="0" ky="0" algn="bl" rotWithShape="0" blurRad="152400" dist="25400" dir="5400000">
+              <a:srgbClr val="0B2B2E">
+                <a:alpha val="9000"/>
+              </a:srgbClr>
+            </a:outerShdw>
+          </a:effectLst>
+        </p:spPr>
+        <p:txBody>
+          <a:bodyPr/>
+          <a:p/>
+        </p:txBody>
+      </p:sp>
+      <p:sp>
+        <p:nvSpPr>
+          <p:cNvPr id="28" name="Shape 26"/>
+          <p:cNvSpPr/>
+          <p:nvPr/>
+        </p:nvSpPr>
+        <p:spPr>
+          <a:xfrm>
+            <a:off x="6498184" y="4361688"/>
+            <a:ext cx="475488" cy="475488"/>
+          </a:xfrm>
+          <a:prstGeom prst="roundRect">
+            <a:avLst>
+              <a:gd name="adj" fmla="val 23077"/>
+            </a:avLst>
+          </a:prstGeom>
+          <a:solidFill>
+            <a:srgbClr val="0E6E6B"/>
+          </a:solidFill>
+          <a:ln/>
+        </p:spPr>
+        <p:txBody>
+          <a:bodyPr/>
+          <a:p/>
+        </p:txBody>
+      </p:sp>
+      <p:sp>
+        <p:nvSpPr>
+          <p:cNvPr id="29" name="Text 27"/>
+          <p:cNvSpPr txBox="1"/>
+          <p:nvPr/>
+        </p:nvSpPr>
+        <p:spPr>
+          <a:xfrm>
+            <a:off x="6498184" y="4361688"/>
+            <a:ext cx="475488" cy="475488"/>
+          </a:xfrm>
+          <a:prstGeom prst="rect">
+            <a:avLst/>
+          </a:prstGeom>
+          <a:noFill/>
+          <a:ln/>
+        </p:spPr>
+        <p:txBody>
+          <a:bodyPr wrap="square" lIns="0" tIns="0" rIns="0" bIns="0" rtlCol="0" anchor="ctr"/>
+          <a:lstStyle/>
+          <a:p>
+            <a:pPr algn="ctr" indent="0" marL="0">
+              <a:buNone/>
+            </a:pPr>
+            <a:r>
+              <a:rPr lang="en-US" sz="1300" b="1" dirty="0">
+                <a:solidFill>
+                  <a:srgbClr val="FFFFFF"/>
+                </a:solidFill>
+                <a:latin typeface="Calibri" pitchFamily="34" charset="0"/>
+                <a:ea typeface="Calibri" pitchFamily="34" charset="-122"/>
+                <a:cs typeface="Calibri" pitchFamily="34" charset="-120"/>
+              </a:rPr>
+              <a:t>04</a:t>
+            </a:r>
+            <a:endParaRPr lang="en-US" sz="1300" dirty="0"/>
+          </a:p>
+        </p:txBody>
+      </p:sp>
+      <p:sp>
+        <p:nvSpPr>
+          <p:cNvPr id="30" name="Text 28"/>
+          <p:cNvSpPr txBox="1"/>
+          <p:nvPr/>
+        </p:nvSpPr>
+        <p:spPr>
+          <a:xfrm>
+            <a:off x="7138264" y="4379976"/>
+            <a:ext cx="4111600" cy="310896"/>
+          </a:xfrm>
+          <a:prstGeom prst="rect">
+            <a:avLst/>
+          </a:prstGeom>
+          <a:noFill/>
+          <a:ln/>
+        </p:spPr>
+        <p:txBody>
+          <a:bodyPr wrap="square" lIns="0" tIns="0" rIns="0" bIns="0" rtlCol="0" anchor="ctr"/>
+          <a:lstStyle/>
+          <a:p>
+            <a:pPr indent="0" marL="0">
+              <a:buNone/>
+            </a:pPr>
+            <a:r>
+              <a:rPr lang="en-US" sz="1600" b="1" dirty="0">
+                <a:solidFill>
+                  <a:srgbClr val="0B2B2E"/>
+                </a:solidFill>
+                <a:latin typeface="Calibri" pitchFamily="34" charset="0"/>
+                <a:ea typeface="Calibri" pitchFamily="34" charset="-122"/>
+                <a:cs typeface="Calibri" pitchFamily="34" charset="-120"/>
+              </a:rPr>
+              <a:t>A public site, live</a:t>
+            </a:r>
+            <a:endParaRPr lang="en-US" sz="1600" dirty="0"/>
+          </a:p>
+        </p:txBody>
+      </p:sp>
+      <p:sp>
+        <p:nvSpPr>
+          <p:cNvPr id="31" name="Text 29"/>
+          <p:cNvSpPr txBox="1"/>
+          <p:nvPr/>
+        </p:nvSpPr>
+        <p:spPr>
+          <a:xfrm>
+            <a:off x="7138264" y="4764024"/>
+            <a:ext cx="4111600" cy="777240"/>
+          </a:xfrm>
+          <a:prstGeom prst="rect">
+            <a:avLst/>
+          </a:prstGeom>
+          <a:noFill/>
+          <a:ln/>
+        </p:spPr>
+        <p:txBody>
+          <a:bodyPr wrap="square" lIns="0" tIns="0" rIns="0" bIns="0" rtlCol="0" anchor="ctr"/>
+          <a:lstStyle/>
+          <a:p>
+            <a:pPr indent="0" marL="0">
+              <a:lnSpc>
+                <a:spcPts val="1800"/>
+              </a:lnSpc>
+              <a:buNone/>
+            </a:pPr>
+            <a:r>
+              <a:rPr lang="en-US" sz="1250" dirty="0">
+                <a:solidFill>
+                  <a:srgbClr val="56696A"/>
+                </a:solidFill>
+                <a:latin typeface="Calibri" pitchFamily="34" charset="0"/>
+                <a:ea typeface="Calibri" pitchFamily="34" charset="-122"/>
+                <a:cs typeface="Calibri" pitchFamily="34" charset="-120"/>
+              </a:rPr>
+              <a:t>Describing the product to clinics of every size, and taking enquiries beyond the pilot.</a:t>
+            </a:r>
+            <a:endParaRPr lang="en-US" sz="1250" dirty="0"/>
+          </a:p>
+        </p:txBody>
+      </p:sp>
+    </p:spTree>
+  </p:cSld>
+  <p:clrMapOvr>
+    <a:masterClrMapping/>
+  </p:clrMapOvr>
+</p:sld>
+</file>
+
+<file path=ppt/slides/slide19.xml><?xml version="1.0" encoding="utf-8"?>
 <p:sld xmlns:a="http://schemas.openxmlformats.org/drawingml/2006/main" xmlns:r="http://schemas.openxmlformats.org/officeDocument/2006/relationships" xmlns:p="http://schemas.openxmlformats.org/presentationml/2006/main">
   <p:cSld name="Slide 18">
     <p:spTree>
@@ -10412,1065 +11471,6 @@
               <a:t>Questions welcome — particularly about what we have not tested yet.</a:t>
             </a:r>
             <a:endParaRPr lang="en-US" sz="1200" dirty="0"/>
-          </a:p>
-        </p:txBody>
-      </p:sp>
-    </p:spTree>
-  </p:cSld>
-  <p:clrMapOvr>
-    <a:masterClrMapping/>
-  </p:clrMapOvr>
-</p:sld>
-</file>
-
-<file path=ppt/slides/slide19.xml><?xml version="1.0" encoding="utf-8"?>
-<p:sld xmlns:a="http://schemas.openxmlformats.org/drawingml/2006/main" xmlns:p="http://schemas.openxmlformats.org/presentationml/2006/main" xmlns:r="http://schemas.openxmlformats.org/officeDocument/2006/relationships">
-  <p:cSld>
-    <p:spTree>
-      <p:nvGrpSpPr>
-        <p:cNvPr id="1" name=""/>
-        <p:cNvGrpSpPr/>
-        <p:nvPr/>
-      </p:nvGrpSpPr>
-      <p:grpSpPr/>
-      <p:sp>
-        <p:nvSpPr>
-          <p:cNvPr id="2" name="Shape 0"/>
-          <p:cNvSpPr/>
-          <p:nvPr/>
-        </p:nvSpPr>
-        <p:spPr>
-          <a:xfrm>
-            <a:off x="0" y="0"/>
-            <a:ext cx="12191695" cy="6858000"/>
-          </a:xfrm>
-          <a:prstGeom prst="rect">
-            <a:avLst/>
-          </a:prstGeom>
-          <a:solidFill>
-            <a:srgbClr val="FFFFFF"/>
-          </a:solidFill>
-          <a:ln w="12700">
-            <a:solidFill>
-              <a:srgbClr val="FFFFFF"/>
-            </a:solidFill>
-            <a:prstDash val="solid"/>
-          </a:ln>
-        </p:spPr>
-        <p:txBody>
-          <a:bodyPr/>
-          <a:p/>
-        </p:txBody>
-      </p:sp>
-      <p:sp>
-        <p:nvSpPr>
-          <p:cNvPr id="3" name="Text 1"/>
-          <p:cNvSpPr txBox="1"/>
-          <p:nvPr/>
-        </p:nvSpPr>
-        <p:spPr>
-          <a:xfrm>
-            <a:off x="640080" y="475488"/>
-            <a:ext cx="7315200" cy="256032"/>
-          </a:xfrm>
-          <a:prstGeom prst="rect">
-            <a:avLst/>
-          </a:prstGeom>
-          <a:noFill/>
-          <a:ln/>
-        </p:spPr>
-        <p:txBody>
-          <a:bodyPr wrap="square" lIns="0" tIns="0" rIns="0" bIns="0" rtlCol="0" anchor="ctr"/>
-          <a:lstStyle/>
-          <a:p>
-            <a:pPr indent="0" marL="0">
-              <a:buNone/>
-            </a:pPr>
-            <a:r>
-              <a:rPr lang="en-US" sz="1100" b="1" spc="240" kern="0" dirty="0">
-                <a:solidFill>
-                  <a:srgbClr val="0E6E6B"/>
-                </a:solidFill>
-                <a:latin typeface="Calibri" pitchFamily="34" charset="0"/>
-                <a:ea typeface="Calibri" pitchFamily="34" charset="-122"/>
-                <a:cs typeface="Calibri" pitchFamily="34" charset="-120"/>
-              </a:rPr>
-              <a:t>SCALE</a:t>
-            </a:r>
-            <a:endParaRPr lang="en-US" sz="1100" dirty="0"/>
-          </a:p>
-        </p:txBody>
-      </p:sp>
-      <p:sp>
-        <p:nvSpPr>
-          <p:cNvPr id="4" name="Text 2"/>
-          <p:cNvSpPr txBox="1"/>
-          <p:nvPr/>
-        </p:nvSpPr>
-        <p:spPr>
-          <a:xfrm>
-            <a:off x="640080" y="822960"/>
-            <a:ext cx="9509760" cy="777240"/>
-          </a:xfrm>
-          <a:prstGeom prst="rect">
-            <a:avLst/>
-          </a:prstGeom>
-          <a:noFill/>
-          <a:ln/>
-        </p:spPr>
-        <p:txBody>
-          <a:bodyPr wrap="square" lIns="0" tIns="0" rIns="0" bIns="0" rtlCol="0" anchor="ctr"/>
-          <a:lstStyle/>
-          <a:p>
-            <a:pPr indent="0" marL="0">
-              <a:buNone/>
-            </a:pPr>
-            <a:r>
-              <a:rPr lang="en-US" sz="3400" b="1" dirty="0">
-                <a:solidFill>
-                  <a:srgbClr val="0B2B2E"/>
-                </a:solidFill>
-                <a:latin typeface="Cambria" pitchFamily="34" charset="0"/>
-                <a:ea typeface="Cambria" pitchFamily="34" charset="-122"/>
-                <a:cs typeface="Cambria" pitchFamily="34" charset="-120"/>
-              </a:rPr>
-              <a:t>One room first. Built for the country.</a:t>
-            </a:r>
-            <a:endParaRPr lang="en-US" sz="3400" dirty="0"/>
-          </a:p>
-        </p:txBody>
-      </p:sp>
-      <p:sp>
-        <p:nvSpPr>
-          <p:cNvPr id="5" name="Text 3"/>
-          <p:cNvSpPr txBox="1"/>
-          <p:nvPr/>
-        </p:nvSpPr>
-        <p:spPr>
-          <a:xfrm>
-            <a:off x="7423099" y="493776"/>
-            <a:ext cx="2788920" cy="256032"/>
-          </a:xfrm>
-          <a:prstGeom prst="rect">
-            <a:avLst/>
-          </a:prstGeom>
-          <a:noFill/>
-          <a:ln/>
-        </p:spPr>
-        <p:txBody>
-          <a:bodyPr wrap="square" lIns="0" tIns="0" rIns="0" bIns="0" rtlCol="0" anchor="ctr"/>
-          <a:lstStyle/>
-          <a:p>
-            <a:pPr algn="r" indent="0" marL="0">
-              <a:buNone/>
-            </a:pPr>
-            <a:r>
-              <a:rPr lang="en-US" sz="1000" b="1" spc="180" kern="0" dirty="0">
-                <a:solidFill>
-                  <a:srgbClr val="8B9C9D"/>
-                </a:solidFill>
-                <a:latin typeface="Calibri" pitchFamily="34" charset="0"/>
-                <a:ea typeface="Calibri" pitchFamily="34" charset="-122"/>
-                <a:cs typeface="Calibri" pitchFamily="34" charset="-120"/>
-              </a:rPr>
-              <a:t>SCALE</a:t>
-            </a:r>
-            <a:endParaRPr lang="en-US" sz="1000" dirty="0"/>
-          </a:p>
-        </p:txBody>
-      </p:sp>
-      <p:sp>
-        <p:nvSpPr>
-          <p:cNvPr id="6" name="Shape 4"/>
-          <p:cNvSpPr/>
-          <p:nvPr/>
-        </p:nvSpPr>
-        <p:spPr>
-          <a:xfrm>
-            <a:off x="10349179" y="548640"/>
-            <a:ext cx="141732" cy="141732"/>
-          </a:xfrm>
-          <a:prstGeom prst="ellipse">
-            <a:avLst/>
-          </a:prstGeom>
-          <a:solidFill>
-            <a:srgbClr val="DFEAE8"/>
-          </a:solidFill>
-          <a:ln/>
-        </p:spPr>
-        <p:txBody>
-          <a:bodyPr/>
-          <a:p/>
-        </p:txBody>
-      </p:sp>
-      <p:sp>
-        <p:nvSpPr>
-          <p:cNvPr id="7" name="Shape 5"/>
-          <p:cNvSpPr/>
-          <p:nvPr/>
-        </p:nvSpPr>
-        <p:spPr>
-          <a:xfrm>
-            <a:off x="10614355" y="548640"/>
-            <a:ext cx="141732" cy="141732"/>
-          </a:xfrm>
-          <a:prstGeom prst="ellipse">
-            <a:avLst/>
-          </a:prstGeom>
-          <a:solidFill>
-            <a:srgbClr val="C9821F"/>
-          </a:solidFill>
-          <a:ln/>
-        </p:spPr>
-        <p:txBody>
-          <a:bodyPr/>
-          <a:p/>
-        </p:txBody>
-      </p:sp>
-      <p:sp>
-        <p:nvSpPr>
-          <p:cNvPr id="8" name="Shape 6"/>
-          <p:cNvSpPr/>
-          <p:nvPr/>
-        </p:nvSpPr>
-        <p:spPr>
-          <a:xfrm>
-            <a:off x="10879531" y="548640"/>
-            <a:ext cx="141732" cy="141732"/>
-          </a:xfrm>
-          <a:prstGeom prst="ellipse">
-            <a:avLst/>
-          </a:prstGeom>
-          <a:solidFill>
-            <a:srgbClr val="DFEAE8"/>
-          </a:solidFill>
-          <a:ln/>
-        </p:spPr>
-        <p:txBody>
-          <a:bodyPr/>
-          <a:p/>
-        </p:txBody>
-      </p:sp>
-      <p:sp>
-        <p:nvSpPr>
-          <p:cNvPr id="9" name="Shape 7"/>
-          <p:cNvSpPr/>
-          <p:nvPr/>
-        </p:nvSpPr>
-        <p:spPr>
-          <a:xfrm>
-            <a:off x="11144707" y="548640"/>
-            <a:ext cx="141732" cy="141732"/>
-          </a:xfrm>
-          <a:prstGeom prst="ellipse">
-            <a:avLst/>
-          </a:prstGeom>
-          <a:solidFill>
-            <a:srgbClr val="DFEAE8"/>
-          </a:solidFill>
-          <a:ln/>
-        </p:spPr>
-        <p:txBody>
-          <a:bodyPr/>
-          <a:p/>
-        </p:txBody>
-      </p:sp>
-      <p:sp>
-        <p:nvSpPr>
-          <p:cNvPr id="10" name="Shape 8"/>
-          <p:cNvSpPr/>
-          <p:nvPr/>
-        </p:nvSpPr>
-        <p:spPr>
-          <a:xfrm>
-            <a:off x="11409883" y="548640"/>
-            <a:ext cx="141732" cy="141732"/>
-          </a:xfrm>
-          <a:prstGeom prst="ellipse">
-            <a:avLst/>
-          </a:prstGeom>
-          <a:solidFill>
-            <a:srgbClr val="DFEAE8"/>
-          </a:solidFill>
-          <a:ln/>
-        </p:spPr>
-        <p:txBody>
-          <a:bodyPr/>
-          <a:p/>
-        </p:txBody>
-      </p:sp>
-      <p:sp>
-        <p:nvSpPr>
-          <p:cNvPr id="11" name="Text 9"/>
-          <p:cNvSpPr txBox="1"/>
-          <p:nvPr/>
-        </p:nvSpPr>
-        <p:spPr>
-          <a:xfrm>
-            <a:off x="640080" y="1664208"/>
-            <a:ext cx="9601200" cy="329184"/>
-          </a:xfrm>
-          <a:prstGeom prst="rect">
-            <a:avLst/>
-          </a:prstGeom>
-          <a:noFill/>
-          <a:ln/>
-        </p:spPr>
-        <p:txBody>
-          <a:bodyPr wrap="square" lIns="0" tIns="0" rIns="0" bIns="0" rtlCol="0" anchor="ctr"/>
-          <a:lstStyle/>
-          <a:p>
-            <a:pPr indent="0" marL="0">
-              <a:buNone/>
-            </a:pPr>
-            <a:r>
-              <a:rPr lang="en-US" sz="1400" dirty="0">
-                <a:solidFill>
-                  <a:srgbClr val="56696A"/>
-                </a:solidFill>
-                <a:latin typeface="Calibri" pitchFamily="34" charset="0"/>
-                <a:ea typeface="Calibri" pitchFamily="34" charset="-122"/>
-                <a:cs typeface="Calibri" pitchFamily="34" charset="-120"/>
-              </a:rPr>
-              <a:t>Krishnanagar is where the evidence came from — not where the ambition ends. ClinicOS is built by Varaxis, at national scale.</a:t>
-            </a:r>
-            <a:endParaRPr lang="en-US" sz="1400" dirty="0"/>
-          </a:p>
-        </p:txBody>
-      </p:sp>
-      <p:sp>
-        <p:nvSpPr>
-          <p:cNvPr id="12" name="Shape 10"/>
-          <p:cNvSpPr/>
-          <p:nvPr/>
-        </p:nvSpPr>
-        <p:spPr>
-          <a:xfrm>
-            <a:off x="640080" y="2212848"/>
-            <a:ext cx="5346040" cy="1664208"/>
-          </a:xfrm>
-          <a:prstGeom prst="roundRect">
-            <a:avLst>
-              <a:gd name="adj" fmla="val 3846"/>
-            </a:avLst>
-          </a:prstGeom>
-          <a:solidFill>
-            <a:srgbClr val="FFFFFF"/>
-          </a:solidFill>
-          <a:ln w="12700">
-            <a:solidFill>
-              <a:srgbClr val="DFEAE8"/>
-            </a:solidFill>
-            <a:prstDash val="solid"/>
-          </a:ln>
-          <a:effectLst>
-            <a:outerShdw sx="100000" sy="100000" kx="0" ky="0" algn="bl" rotWithShape="0" blurRad="152400" dist="25400" dir="5400000">
-              <a:srgbClr val="0B2B2E">
-                <a:alpha val="9000"/>
-              </a:srgbClr>
-            </a:outerShdw>
-          </a:effectLst>
-        </p:spPr>
-        <p:txBody>
-          <a:bodyPr/>
-          <a:p/>
-        </p:txBody>
-      </p:sp>
-      <p:sp>
-        <p:nvSpPr>
-          <p:cNvPr id="13" name="Shape 11"/>
-          <p:cNvSpPr/>
-          <p:nvPr/>
-        </p:nvSpPr>
-        <p:spPr>
-          <a:xfrm>
-            <a:off x="932688" y="2487168"/>
-            <a:ext cx="475488" cy="475488"/>
-          </a:xfrm>
-          <a:prstGeom prst="roundRect">
-            <a:avLst>
-              <a:gd name="adj" fmla="val 23077"/>
-            </a:avLst>
-          </a:prstGeom>
-          <a:solidFill>
-            <a:srgbClr val="0E6E6B"/>
-          </a:solidFill>
-          <a:ln/>
-        </p:spPr>
-        <p:txBody>
-          <a:bodyPr/>
-          <a:p/>
-        </p:txBody>
-      </p:sp>
-      <p:sp>
-        <p:nvSpPr>
-          <p:cNvPr id="14" name="Text 12"/>
-          <p:cNvSpPr txBox="1"/>
-          <p:nvPr/>
-        </p:nvSpPr>
-        <p:spPr>
-          <a:xfrm>
-            <a:off x="932688" y="2487168"/>
-            <a:ext cx="475488" cy="475488"/>
-          </a:xfrm>
-          <a:prstGeom prst="rect">
-            <a:avLst/>
-          </a:prstGeom>
-          <a:noFill/>
-          <a:ln/>
-        </p:spPr>
-        <p:txBody>
-          <a:bodyPr wrap="square" lIns="0" tIns="0" rIns="0" bIns="0" rtlCol="0" anchor="ctr"/>
-          <a:lstStyle/>
-          <a:p>
-            <a:pPr algn="ctr" indent="0" marL="0">
-              <a:buNone/>
-            </a:pPr>
-            <a:r>
-              <a:rPr lang="en-US" sz="1300" b="1" dirty="0">
-                <a:solidFill>
-                  <a:srgbClr val="FFFFFF"/>
-                </a:solidFill>
-                <a:latin typeface="Calibri" pitchFamily="34" charset="0"/>
-                <a:ea typeface="Calibri" pitchFamily="34" charset="-122"/>
-                <a:cs typeface="Calibri" pitchFamily="34" charset="-120"/>
-              </a:rPr>
-              <a:t>01</a:t>
-            </a:r>
-            <a:endParaRPr lang="en-US" sz="1300" dirty="0"/>
-          </a:p>
-        </p:txBody>
-      </p:sp>
-      <p:sp>
-        <p:nvSpPr>
-          <p:cNvPr id="15" name="Text 13"/>
-          <p:cNvSpPr txBox="1"/>
-          <p:nvPr/>
-        </p:nvSpPr>
-        <p:spPr>
-          <a:xfrm>
-            <a:off x="1572768" y="2505456"/>
-            <a:ext cx="4111600" cy="310896"/>
-          </a:xfrm>
-          <a:prstGeom prst="rect">
-            <a:avLst/>
-          </a:prstGeom>
-          <a:noFill/>
-          <a:ln/>
-        </p:spPr>
-        <p:txBody>
-          <a:bodyPr wrap="square" lIns="0" tIns="0" rIns="0" bIns="0" rtlCol="0" anchor="ctr"/>
-          <a:lstStyle/>
-          <a:p>
-            <a:pPr indent="0" marL="0">
-              <a:buNone/>
-            </a:pPr>
-            <a:r>
-              <a:rPr lang="en-US" sz="1600" b="1" dirty="0">
-                <a:solidFill>
-                  <a:srgbClr val="0B2B2E"/>
-                </a:solidFill>
-                <a:latin typeface="Calibri" pitchFamily="34" charset="0"/>
-                <a:ea typeface="Calibri" pitchFamily="34" charset="-122"/>
-                <a:cs typeface="Calibri" pitchFamily="34" charset="-120"/>
-              </a:rPr>
-              <a:t>Accounts and roles</a:t>
-            </a:r>
-            <a:endParaRPr lang="en-US" sz="1600" dirty="0"/>
-          </a:p>
-        </p:txBody>
-      </p:sp>
-      <p:sp>
-        <p:nvSpPr>
-          <p:cNvPr id="16" name="Text 14"/>
-          <p:cNvSpPr txBox="1"/>
-          <p:nvPr/>
-        </p:nvSpPr>
-        <p:spPr>
-          <a:xfrm>
-            <a:off x="1572768" y="2889504"/>
-            <a:ext cx="4111600" cy="777240"/>
-          </a:xfrm>
-          <a:prstGeom prst="rect">
-            <a:avLst/>
-          </a:prstGeom>
-          <a:noFill/>
-          <a:ln/>
-        </p:spPr>
-        <p:txBody>
-          <a:bodyPr wrap="square" lIns="0" tIns="0" rIns="0" bIns="0" rtlCol="0" anchor="ctr"/>
-          <a:lstStyle/>
-          <a:p>
-            <a:pPr indent="0" marL="0">
-              <a:lnSpc>
-                <a:spcPts val="1800"/>
-              </a:lnSpc>
-              <a:buNone/>
-            </a:pPr>
-            <a:r>
-              <a:rPr lang="en-US" sz="1250" dirty="0">
-                <a:solidFill>
-                  <a:srgbClr val="56696A"/>
-                </a:solidFill>
-                <a:latin typeface="Calibri" pitchFamily="34" charset="0"/>
-                <a:ea typeface="Calibri" pitchFamily="34" charset="-122"/>
-                <a:cs typeface="Calibri" pitchFamily="34" charset="-120"/>
-              </a:rPr>
-              <a:t>Doctor, front desk and clinic admin — checked on every request, not just hidden behind a menu.</a:t>
-            </a:r>
-            <a:endParaRPr lang="en-US" sz="1250" dirty="0"/>
-          </a:p>
-        </p:txBody>
-      </p:sp>
-      <p:sp>
-        <p:nvSpPr>
-          <p:cNvPr id="17" name="Shape 15"/>
-          <p:cNvSpPr/>
-          <p:nvPr/>
-        </p:nvSpPr>
-        <p:spPr>
-          <a:xfrm>
-            <a:off x="6205576" y="2212848"/>
-            <a:ext cx="5346040" cy="1664208"/>
-          </a:xfrm>
-          <a:prstGeom prst="roundRect">
-            <a:avLst>
-              <a:gd name="adj" fmla="val 3846"/>
-            </a:avLst>
-          </a:prstGeom>
-          <a:solidFill>
-            <a:srgbClr val="FFFFFF"/>
-          </a:solidFill>
-          <a:ln w="12700">
-            <a:solidFill>
-              <a:srgbClr val="DFEAE8"/>
-            </a:solidFill>
-            <a:prstDash val="solid"/>
-          </a:ln>
-          <a:effectLst>
-            <a:outerShdw sx="100000" sy="100000" kx="0" ky="0" algn="bl" rotWithShape="0" blurRad="152400" dist="25400" dir="5400000">
-              <a:srgbClr val="0B2B2E">
-                <a:alpha val="9000"/>
-              </a:srgbClr>
-            </a:outerShdw>
-          </a:effectLst>
-        </p:spPr>
-        <p:txBody>
-          <a:bodyPr/>
-          <a:p/>
-        </p:txBody>
-      </p:sp>
-      <p:sp>
-        <p:nvSpPr>
-          <p:cNvPr id="18" name="Shape 16"/>
-          <p:cNvSpPr/>
-          <p:nvPr/>
-        </p:nvSpPr>
-        <p:spPr>
-          <a:xfrm>
-            <a:off x="6498184" y="2487168"/>
-            <a:ext cx="475488" cy="475488"/>
-          </a:xfrm>
-          <a:prstGeom prst="roundRect">
-            <a:avLst>
-              <a:gd name="adj" fmla="val 23077"/>
-            </a:avLst>
-          </a:prstGeom>
-          <a:solidFill>
-            <a:srgbClr val="C9821F"/>
-          </a:solidFill>
-          <a:ln/>
-        </p:spPr>
-        <p:txBody>
-          <a:bodyPr/>
-          <a:p/>
-        </p:txBody>
-      </p:sp>
-      <p:sp>
-        <p:nvSpPr>
-          <p:cNvPr id="19" name="Text 17"/>
-          <p:cNvSpPr txBox="1"/>
-          <p:nvPr/>
-        </p:nvSpPr>
-        <p:spPr>
-          <a:xfrm>
-            <a:off x="6498184" y="2487168"/>
-            <a:ext cx="475488" cy="475488"/>
-          </a:xfrm>
-          <a:prstGeom prst="rect">
-            <a:avLst/>
-          </a:prstGeom>
-          <a:noFill/>
-          <a:ln/>
-        </p:spPr>
-        <p:txBody>
-          <a:bodyPr wrap="square" lIns="0" tIns="0" rIns="0" bIns="0" rtlCol="0" anchor="ctr"/>
-          <a:lstStyle/>
-          <a:p>
-            <a:pPr algn="ctr" indent="0" marL="0">
-              <a:buNone/>
-            </a:pPr>
-            <a:r>
-              <a:rPr lang="en-US" sz="1300" b="1" dirty="0">
-                <a:solidFill>
-                  <a:srgbClr val="FFFFFF"/>
-                </a:solidFill>
-                <a:latin typeface="Calibri" pitchFamily="34" charset="0"/>
-                <a:ea typeface="Calibri" pitchFamily="34" charset="-122"/>
-                <a:cs typeface="Calibri" pitchFamily="34" charset="-120"/>
-              </a:rPr>
-              <a:t>02</a:t>
-            </a:r>
-            <a:endParaRPr lang="en-US" sz="1300" dirty="0"/>
-          </a:p>
-        </p:txBody>
-      </p:sp>
-      <p:sp>
-        <p:nvSpPr>
-          <p:cNvPr id="20" name="Text 18"/>
-          <p:cNvSpPr txBox="1"/>
-          <p:nvPr/>
-        </p:nvSpPr>
-        <p:spPr>
-          <a:xfrm>
-            <a:off x="7138264" y="2505456"/>
-            <a:ext cx="4111600" cy="310896"/>
-          </a:xfrm>
-          <a:prstGeom prst="rect">
-            <a:avLst/>
-          </a:prstGeom>
-          <a:noFill/>
-          <a:ln/>
-        </p:spPr>
-        <p:txBody>
-          <a:bodyPr wrap="square" lIns="0" tIns="0" rIns="0" bIns="0" rtlCol="0" anchor="ctr"/>
-          <a:lstStyle/>
-          <a:p>
-            <a:pPr indent="0" marL="0">
-              <a:buNone/>
-            </a:pPr>
-            <a:r>
-              <a:rPr lang="en-US" sz="1600" b="1" dirty="0">
-                <a:solidFill>
-                  <a:srgbClr val="0B2B2E"/>
-                </a:solidFill>
-                <a:latin typeface="Calibri" pitchFamily="34" charset="0"/>
-                <a:ea typeface="Calibri" pitchFamily="34" charset="-122"/>
-                <a:cs typeface="Calibri" pitchFamily="34" charset="-120"/>
-              </a:rPr>
-              <a:t>A front desk that runs the day</a:t>
-            </a:r>
-            <a:endParaRPr lang="en-US" sz="1600" dirty="0"/>
-          </a:p>
-        </p:txBody>
-      </p:sp>
-      <p:sp>
-        <p:nvSpPr>
-          <p:cNvPr id="21" name="Text 19"/>
-          <p:cNvSpPr txBox="1"/>
-          <p:nvPr/>
-        </p:nvSpPr>
-        <p:spPr>
-          <a:xfrm>
-            <a:off x="7138264" y="2889504"/>
-            <a:ext cx="4111600" cy="777240"/>
-          </a:xfrm>
-          <a:prstGeom prst="rect">
-            <a:avLst/>
-          </a:prstGeom>
-          <a:noFill/>
-          <a:ln/>
-        </p:spPr>
-        <p:txBody>
-          <a:bodyPr wrap="square" lIns="0" tIns="0" rIns="0" bIns="0" rtlCol="0" anchor="ctr"/>
-          <a:lstStyle/>
-          <a:p>
-            <a:pPr indent="0" marL="0">
-              <a:lnSpc>
-                <a:spcPts val="1800"/>
-              </a:lnSpc>
-              <a:buNone/>
-            </a:pPr>
-            <a:r>
-              <a:rPr lang="en-US" sz="1250" dirty="0">
-                <a:solidFill>
-                  <a:srgbClr val="56696A"/>
-                </a:solidFill>
-                <a:latin typeface="Calibri" pitchFamily="34" charset="0"/>
-                <a:ea typeface="Calibri" pitchFamily="34" charset="-122"/>
-                <a:cs typeface="Calibri" pitchFamily="34" charset="-120"/>
-              </a:rPr>
-              <a:t>A queue, a day's list and a doctor's worklist, so the clinic works as more than one person.</a:t>
-            </a:r>
-            <a:endParaRPr lang="en-US" sz="1250" dirty="0"/>
-          </a:p>
-        </p:txBody>
-      </p:sp>
-      <p:sp>
-        <p:nvSpPr>
-          <p:cNvPr id="22" name="Shape 20"/>
-          <p:cNvSpPr/>
-          <p:nvPr/>
-        </p:nvSpPr>
-        <p:spPr>
-          <a:xfrm>
-            <a:off x="640080" y="4087368"/>
-            <a:ext cx="5346040" cy="1664208"/>
-          </a:xfrm>
-          <a:prstGeom prst="roundRect">
-            <a:avLst>
-              <a:gd name="adj" fmla="val 3846"/>
-            </a:avLst>
-          </a:prstGeom>
-          <a:solidFill>
-            <a:srgbClr val="FFFFFF"/>
-          </a:solidFill>
-          <a:ln w="12700">
-            <a:solidFill>
-              <a:srgbClr val="DFEAE8"/>
-            </a:solidFill>
-            <a:prstDash val="solid"/>
-          </a:ln>
-          <a:effectLst>
-            <a:outerShdw sx="100000" sy="100000" kx="0" ky="0" algn="bl" rotWithShape="0" blurRad="152400" dist="25400" dir="5400000">
-              <a:srgbClr val="0B2B2E">
-                <a:alpha val="9000"/>
-              </a:srgbClr>
-            </a:outerShdw>
-          </a:effectLst>
-        </p:spPr>
-        <p:txBody>
-          <a:bodyPr/>
-          <a:p/>
-        </p:txBody>
-      </p:sp>
-      <p:sp>
-        <p:nvSpPr>
-          <p:cNvPr id="23" name="Shape 21"/>
-          <p:cNvSpPr/>
-          <p:nvPr/>
-        </p:nvSpPr>
-        <p:spPr>
-          <a:xfrm>
-            <a:off x="932688" y="4361688"/>
-            <a:ext cx="475488" cy="475488"/>
-          </a:xfrm>
-          <a:prstGeom prst="roundRect">
-            <a:avLst>
-              <a:gd name="adj" fmla="val 23077"/>
-            </a:avLst>
-          </a:prstGeom>
-          <a:solidFill>
-            <a:srgbClr val="0E6E6B"/>
-          </a:solidFill>
-          <a:ln/>
-        </p:spPr>
-        <p:txBody>
-          <a:bodyPr/>
-          <a:p/>
-        </p:txBody>
-      </p:sp>
-      <p:sp>
-        <p:nvSpPr>
-          <p:cNvPr id="24" name="Text 22"/>
-          <p:cNvSpPr txBox="1"/>
-          <p:nvPr/>
-        </p:nvSpPr>
-        <p:spPr>
-          <a:xfrm>
-            <a:off x="932688" y="4361688"/>
-            <a:ext cx="475488" cy="475488"/>
-          </a:xfrm>
-          <a:prstGeom prst="rect">
-            <a:avLst/>
-          </a:prstGeom>
-          <a:noFill/>
-          <a:ln/>
-        </p:spPr>
-        <p:txBody>
-          <a:bodyPr wrap="square" lIns="0" tIns="0" rIns="0" bIns="0" rtlCol="0" anchor="ctr"/>
-          <a:lstStyle/>
-          <a:p>
-            <a:pPr algn="ctr" indent="0" marL="0">
-              <a:buNone/>
-            </a:pPr>
-            <a:r>
-              <a:rPr lang="en-US" sz="1300" b="1" dirty="0">
-                <a:solidFill>
-                  <a:srgbClr val="FFFFFF"/>
-                </a:solidFill>
-                <a:latin typeface="Calibri" pitchFamily="34" charset="0"/>
-                <a:ea typeface="Calibri" pitchFamily="34" charset="-122"/>
-                <a:cs typeface="Calibri" pitchFamily="34" charset="-120"/>
-              </a:rPr>
-              <a:t>03</a:t>
-            </a:r>
-            <a:endParaRPr lang="en-US" sz="1300" dirty="0"/>
-          </a:p>
-        </p:txBody>
-      </p:sp>
-      <p:sp>
-        <p:nvSpPr>
-          <p:cNvPr id="25" name="Text 23"/>
-          <p:cNvSpPr txBox="1"/>
-          <p:nvPr/>
-        </p:nvSpPr>
-        <p:spPr>
-          <a:xfrm>
-            <a:off x="1572768" y="4379976"/>
-            <a:ext cx="4111600" cy="310896"/>
-          </a:xfrm>
-          <a:prstGeom prst="rect">
-            <a:avLst/>
-          </a:prstGeom>
-          <a:noFill/>
-          <a:ln/>
-        </p:spPr>
-        <p:txBody>
-          <a:bodyPr wrap="square" lIns="0" tIns="0" rIns="0" bIns="0" rtlCol="0" anchor="ctr"/>
-          <a:lstStyle/>
-          <a:p>
-            <a:pPr indent="0" marL="0">
-              <a:buNone/>
-            </a:pPr>
-            <a:r>
-              <a:rPr lang="en-US" sz="1600" b="1" dirty="0">
-                <a:solidFill>
-                  <a:srgbClr val="0B2B2E"/>
-                </a:solidFill>
-                <a:latin typeface="Calibri" pitchFamily="34" charset="0"/>
-                <a:ea typeface="Calibri" pitchFamily="34" charset="-122"/>
-                <a:cs typeface="Calibri" pitchFamily="34" charset="-120"/>
-              </a:rPr>
-              <a:t>An activity log</a:t>
-            </a:r>
-            <a:endParaRPr lang="en-US" sz="1600" dirty="0"/>
-          </a:p>
-        </p:txBody>
-      </p:sp>
-      <p:sp>
-        <p:nvSpPr>
-          <p:cNvPr id="26" name="Text 24"/>
-          <p:cNvSpPr txBox="1"/>
-          <p:nvPr/>
-        </p:nvSpPr>
-        <p:spPr>
-          <a:xfrm>
-            <a:off x="1572768" y="4764024"/>
-            <a:ext cx="4111600" cy="777240"/>
-          </a:xfrm>
-          <a:prstGeom prst="rect">
-            <a:avLst/>
-          </a:prstGeom>
-          <a:noFill/>
-          <a:ln/>
-        </p:spPr>
-        <p:txBody>
-          <a:bodyPr wrap="square" lIns="0" tIns="0" rIns="0" bIns="0" rtlCol="0" anchor="ctr"/>
-          <a:lstStyle/>
-          <a:p>
-            <a:pPr indent="0" marL="0">
-              <a:lnSpc>
-                <a:spcPts val="1800"/>
-              </a:lnSpc>
-              <a:buNone/>
-            </a:pPr>
-            <a:r>
-              <a:rPr lang="en-US" sz="1250" dirty="0">
-                <a:solidFill>
-                  <a:srgbClr val="56696A"/>
-                </a:solidFill>
-                <a:latin typeface="Calibri" pitchFamily="34" charset="0"/>
-                <a:ea typeface="Calibri" pitchFamily="34" charset="-122"/>
-                <a:cs typeface="Calibri" pitchFamily="34" charset="-120"/>
-              </a:rPr>
-              <a:t>Every account action is recorded, so who did what is always answerable.</a:t>
-            </a:r>
-            <a:endParaRPr lang="en-US" sz="1250" dirty="0"/>
-          </a:p>
-        </p:txBody>
-      </p:sp>
-      <p:sp>
-        <p:nvSpPr>
-          <p:cNvPr id="27" name="Shape 25"/>
-          <p:cNvSpPr/>
-          <p:nvPr/>
-        </p:nvSpPr>
-        <p:spPr>
-          <a:xfrm>
-            <a:off x="6205576" y="4087368"/>
-            <a:ext cx="5346040" cy="1664208"/>
-          </a:xfrm>
-          <a:prstGeom prst="roundRect">
-            <a:avLst>
-              <a:gd name="adj" fmla="val 3846"/>
-            </a:avLst>
-          </a:prstGeom>
-          <a:solidFill>
-            <a:srgbClr val="FFFFFF"/>
-          </a:solidFill>
-          <a:ln w="12700">
-            <a:solidFill>
-              <a:srgbClr val="DFEAE8"/>
-            </a:solidFill>
-            <a:prstDash val="solid"/>
-          </a:ln>
-          <a:effectLst>
-            <a:outerShdw sx="100000" sy="100000" kx="0" ky="0" algn="bl" rotWithShape="0" blurRad="152400" dist="25400" dir="5400000">
-              <a:srgbClr val="0B2B2E">
-                <a:alpha val="9000"/>
-              </a:srgbClr>
-            </a:outerShdw>
-          </a:effectLst>
-        </p:spPr>
-        <p:txBody>
-          <a:bodyPr/>
-          <a:p/>
-        </p:txBody>
-      </p:sp>
-      <p:sp>
-        <p:nvSpPr>
-          <p:cNvPr id="28" name="Shape 26"/>
-          <p:cNvSpPr/>
-          <p:nvPr/>
-        </p:nvSpPr>
-        <p:spPr>
-          <a:xfrm>
-            <a:off x="6498184" y="4361688"/>
-            <a:ext cx="475488" cy="475488"/>
-          </a:xfrm>
-          <a:prstGeom prst="roundRect">
-            <a:avLst>
-              <a:gd name="adj" fmla="val 23077"/>
-            </a:avLst>
-          </a:prstGeom>
-          <a:solidFill>
-            <a:srgbClr val="0E6E6B"/>
-          </a:solidFill>
-          <a:ln/>
-        </p:spPr>
-        <p:txBody>
-          <a:bodyPr/>
-          <a:p/>
-        </p:txBody>
-      </p:sp>
-      <p:sp>
-        <p:nvSpPr>
-          <p:cNvPr id="29" name="Text 27"/>
-          <p:cNvSpPr txBox="1"/>
-          <p:nvPr/>
-        </p:nvSpPr>
-        <p:spPr>
-          <a:xfrm>
-            <a:off x="6498184" y="4361688"/>
-            <a:ext cx="475488" cy="475488"/>
-          </a:xfrm>
-          <a:prstGeom prst="rect">
-            <a:avLst/>
-          </a:prstGeom>
-          <a:noFill/>
-          <a:ln/>
-        </p:spPr>
-        <p:txBody>
-          <a:bodyPr wrap="square" lIns="0" tIns="0" rIns="0" bIns="0" rtlCol="0" anchor="ctr"/>
-          <a:lstStyle/>
-          <a:p>
-            <a:pPr algn="ctr" indent="0" marL="0">
-              <a:buNone/>
-            </a:pPr>
-            <a:r>
-              <a:rPr lang="en-US" sz="1300" b="1" dirty="0">
-                <a:solidFill>
-                  <a:srgbClr val="FFFFFF"/>
-                </a:solidFill>
-                <a:latin typeface="Calibri" pitchFamily="34" charset="0"/>
-                <a:ea typeface="Calibri" pitchFamily="34" charset="-122"/>
-                <a:cs typeface="Calibri" pitchFamily="34" charset="-120"/>
-              </a:rPr>
-              <a:t>04</a:t>
-            </a:r>
-            <a:endParaRPr lang="en-US" sz="1300" dirty="0"/>
-          </a:p>
-        </p:txBody>
-      </p:sp>
-      <p:sp>
-        <p:nvSpPr>
-          <p:cNvPr id="30" name="Text 28"/>
-          <p:cNvSpPr txBox="1"/>
-          <p:nvPr/>
-        </p:nvSpPr>
-        <p:spPr>
-          <a:xfrm>
-            <a:off x="7138264" y="4379976"/>
-            <a:ext cx="4111600" cy="310896"/>
-          </a:xfrm>
-          <a:prstGeom prst="rect">
-            <a:avLst/>
-          </a:prstGeom>
-          <a:noFill/>
-          <a:ln/>
-        </p:spPr>
-        <p:txBody>
-          <a:bodyPr wrap="square" lIns="0" tIns="0" rIns="0" bIns="0" rtlCol="0" anchor="ctr"/>
-          <a:lstStyle/>
-          <a:p>
-            <a:pPr indent="0" marL="0">
-              <a:buNone/>
-            </a:pPr>
-            <a:r>
-              <a:rPr lang="en-US" sz="1600" b="1" dirty="0">
-                <a:solidFill>
-                  <a:srgbClr val="0B2B2E"/>
-                </a:solidFill>
-                <a:latin typeface="Calibri" pitchFamily="34" charset="0"/>
-                <a:ea typeface="Calibri" pitchFamily="34" charset="-122"/>
-                <a:cs typeface="Calibri" pitchFamily="34" charset="-120"/>
-              </a:rPr>
-              <a:t>A public site, live</a:t>
-            </a:r>
-            <a:endParaRPr lang="en-US" sz="1600" dirty="0"/>
-          </a:p>
-        </p:txBody>
-      </p:sp>
-      <p:sp>
-        <p:nvSpPr>
-          <p:cNvPr id="31" name="Text 29"/>
-          <p:cNvSpPr txBox="1"/>
-          <p:nvPr/>
-        </p:nvSpPr>
-        <p:spPr>
-          <a:xfrm>
-            <a:off x="7138264" y="4764024"/>
-            <a:ext cx="4111600" cy="777240"/>
-          </a:xfrm>
-          <a:prstGeom prst="rect">
-            <a:avLst/>
-          </a:prstGeom>
-          <a:noFill/>
-          <a:ln/>
-        </p:spPr>
-        <p:txBody>
-          <a:bodyPr wrap="square" lIns="0" tIns="0" rIns="0" bIns="0" rtlCol="0" anchor="ctr"/>
-          <a:lstStyle/>
-          <a:p>
-            <a:pPr indent="0" marL="0">
-              <a:lnSpc>
-                <a:spcPts val="1800"/>
-              </a:lnSpc>
-              <a:buNone/>
-            </a:pPr>
-            <a:r>
-              <a:rPr lang="en-US" sz="1250" dirty="0">
-                <a:solidFill>
-                  <a:srgbClr val="56696A"/>
-                </a:solidFill>
-                <a:latin typeface="Calibri" pitchFamily="34" charset="0"/>
-                <a:ea typeface="Calibri" pitchFamily="34" charset="-122"/>
-                <a:cs typeface="Calibri" pitchFamily="34" charset="-120"/>
-              </a:rPr>
-              <a:t>Describing the product to clinics of every size, and taking enquiries beyond the pilot.</a:t>
-            </a:r>
-            <a:endParaRPr lang="en-US" sz="1250" dirty="0"/>
           </a:p>
         </p:txBody>
       </p:sp>
@@ -11523,6 +11523,10 @@
             <a:prstDash val="solid"/>
           </a:ln>
         </p:spPr>
+        <p:txBody>
+          <a:bodyPr/>
+          <a:p/>
+        </p:txBody>
       </p:sp>
       <p:sp>
         <p:nvSpPr>
@@ -11680,7 +11684,7 @@
                 <a:ea typeface="Calibri" pitchFamily="34" charset="-122"/>
                 <a:cs typeface="Calibri" pitchFamily="34" charset="-120"/>
               </a:rPr>
-              <a:t>That chamber is the unit this project studies — because it is where the largest number of Indian patients are actually seen, and almost no clinical software is designed for it.</a:t>
+              <a:t>That chamber is the unit this project studies — it is where the largest number of Indian patients are seen, and almost no clinical software is built for it. It is also where Varaxis's national ambitions for this product begin.</a:t>
             </a:r>
             <a:endParaRPr lang="en-US" sz="1500" dirty="0"/>
           </a:p>
@@ -11719,7 +11723,7 @@
                 <a:ea typeface="Calibri" pitchFamily="34" charset="-122"/>
                 <a:cs typeface="Calibri" pitchFamily="34" charset="-120"/>
               </a:rPr>
-              <a:t>Field site: Krishnanagar, Nadia district, West Bengal</a:t>
+              <a:t>Field site: Krishnanagar, Nadia, West Bengal — the starting point, not the limit.</a:t>
             </a:r>
             <a:endParaRPr lang="en-US" sz="1250" dirty="0"/>
           </a:p>
@@ -11746,6 +11750,10 @@
           </a:solidFill>
           <a:ln/>
         </p:spPr>
+        <p:txBody>
+          <a:bodyPr/>
+          <a:p/>
+        </p:txBody>
       </p:sp>
       <p:sp>
         <p:nvSpPr>
@@ -11849,6 +11857,10 @@
           </a:solidFill>
           <a:ln/>
         </p:spPr>
+        <p:txBody>
+          <a:bodyPr/>
+          <a:p/>
+        </p:txBody>
       </p:sp>
       <p:sp>
         <p:nvSpPr>
@@ -11959,6 +11971,10 @@
             </a:outerShdw>
           </a:effectLst>
         </p:spPr>
+        <p:txBody>
+          <a:bodyPr/>
+          <a:p/>
+        </p:txBody>
       </p:sp>
       <p:sp>
         <p:nvSpPr>

--- a/artifacts/ClinicOS_DesignThinking_Deck.pptx
+++ b/artifacts/ClinicOS_DesignThinking_Deck.pptx
@@ -2616,7 +2616,7 @@
                 <a:ea typeface="Calibri" pitchFamily="34" charset="-122"/>
                 <a:cs typeface="Calibri" pitchFamily="34" charset="-120"/>
               </a:rPr>
-              <a:t>A design-thinking case study built from single-doctor clinics in Krishnanagar, Nadia — the field site where the evidence was gathered. What started there is now built by Varaxis, designed to scale nationally, and in time, internationally.</a:t>
+              <a:t>Built by Varaxis to work at the scale of the whole country, and in time, beyond it — this design-thinking case study traces the evidence back to where it started: single-doctor clinics in Krishnanagar, Nadia.</a:t>
             </a:r>
             <a:endParaRPr lang="en-US" sz="1450" dirty="0"/>
           </a:p>

--- a/artifacts/ClinicOS_DesignThinking_Deck.pptx
+++ b/artifacts/ClinicOS_DesignThinking_Deck.pptx
@@ -2496,7 +2496,7 @@
                 <a:ea typeface="Calibri" pitchFamily="34" charset="-122"/>
                 <a:cs typeface="Calibri" pitchFamily="34" charset="-120"/>
               </a:rPr>
-              <a:t>DESIGN THINKING  ·  B.TECH CSE (AI &amp; ML)  ·  SEMESTER I</a:t>
+              <a:t>DESIGN THINKING  ·  PRODUCT CASE STUDY  ·  VARAXIS</a:t>
             </a:r>
             <a:endParaRPr lang="en-US" sz="1150" dirty="0"/>
           </a:p>
@@ -2616,7 +2616,7 @@
                 <a:ea typeface="Calibri" pitchFamily="34" charset="-122"/>
                 <a:cs typeface="Calibri" pitchFamily="34" charset="-120"/>
               </a:rPr>
-              <a:t>Built by Varaxis to work at the scale of the whole country, and in time, beyond it — this design-thinking case study traces the evidence back to where it started: single-doctor clinics in Krishnanagar, Nadia.</a:t>
+              <a:t>Built by Varaxis to work at the scale of the whole country, and in time, beyond it — this design-thinking case study traces the evidence back to where it started: a single-doctor rural clinic, one room, one doctor, one register.</a:t>
             </a:r>
             <a:endParaRPr lang="en-US" sz="1450" dirty="0"/>
           </a:p>
@@ -2655,7 +2655,7 @@
                 <a:ea typeface="Calibri" pitchFamily="34" charset="-122"/>
                 <a:cs typeface="Calibri" pitchFamily="34" charset="-120"/>
               </a:rPr>
-              <a:t>Ishaan Seal · Varaxis</a:t>
+              <a:t>Varaxis</a:t>
             </a:r>
             <a:endParaRPr lang="en-US" sz="1400" dirty="0"/>
           </a:p>
@@ -2694,7 +2694,7 @@
                 <a:ea typeface="Calibri" pitchFamily="34" charset="-122"/>
                 <a:cs typeface="Calibri" pitchFamily="34" charset="-120"/>
               </a:rPr>
-              <a:t>Field site: Krishnanagar, Nadia · West Bengal</a:t>
+              <a:t>National reach today. Global reach ahead.</a:t>
             </a:r>
             <a:endParaRPr lang="en-US" sz="1200" dirty="0"/>
           </a:p>
@@ -4333,6 +4333,10 @@
             <a:prstDash val="solid"/>
           </a:ln>
         </p:spPr>
+        <p:txBody>
+          <a:bodyPr/>
+          <a:p/>
+        </p:txBody>
       </p:sp>
       <p:sp>
         <p:nvSpPr>
@@ -4470,6 +4474,10 @@
           </a:solidFill>
           <a:ln/>
         </p:spPr>
+        <p:txBody>
+          <a:bodyPr/>
+          <a:p/>
+        </p:txBody>
       </p:sp>
       <p:sp>
         <p:nvSpPr>
@@ -4490,6 +4498,10 @@
           </a:solidFill>
           <a:ln/>
         </p:spPr>
+        <p:txBody>
+          <a:bodyPr/>
+          <a:p/>
+        </p:txBody>
       </p:sp>
       <p:sp>
         <p:nvSpPr>
@@ -4510,6 +4522,10 @@
           </a:solidFill>
           <a:ln/>
         </p:spPr>
+        <p:txBody>
+          <a:bodyPr/>
+          <a:p/>
+        </p:txBody>
       </p:sp>
       <p:sp>
         <p:nvSpPr>
@@ -4530,6 +4546,10 @@
           </a:solidFill>
           <a:ln/>
         </p:spPr>
+        <p:txBody>
+          <a:bodyPr/>
+          <a:p/>
+        </p:txBody>
       </p:sp>
       <p:sp>
         <p:nvSpPr>
@@ -4550,6 +4570,10 @@
           </a:solidFill>
           <a:ln/>
         </p:spPr>
+        <p:txBody>
+          <a:bodyPr/>
+          <a:p/>
+        </p:txBody>
       </p:sp>
       <p:sp>
         <p:nvSpPr>
@@ -4623,6 +4647,10 @@
             </a:outerShdw>
           </a:effectLst>
         </p:spPr>
+        <p:txBody>
+          <a:bodyPr/>
+          <a:p/>
+        </p:txBody>
       </p:sp>
       <p:sp>
         <p:nvSpPr>
@@ -4643,6 +4671,10 @@
           </a:solidFill>
           <a:ln/>
         </p:spPr>
+        <p:txBody>
+          <a:bodyPr/>
+          <a:p/>
+        </p:txBody>
       </p:sp>
       <p:pic>
         <p:nvPicPr>
@@ -4782,6 +4814,10 @@
             </a:outerShdw>
           </a:effectLst>
         </p:spPr>
+        <p:txBody>
+          <a:bodyPr/>
+          <a:p/>
+        </p:txBody>
       </p:sp>
       <p:sp>
         <p:nvSpPr>
@@ -4802,6 +4838,10 @@
           </a:solidFill>
           <a:ln/>
         </p:spPr>
+        <p:txBody>
+          <a:bodyPr/>
+          <a:p/>
+        </p:txBody>
       </p:sp>
       <p:pic>
         <p:nvPicPr>
@@ -4902,7 +4942,7 @@
                 <a:ea typeface="Calibri" pitchFamily="34" charset="-122"/>
                 <a:cs typeface="Calibri" pitchFamily="34" charset="-120"/>
               </a:rPr>
-              <a:t>Consultation content is sensitive personal data. Informed consent, purpose limitation and deletion rights apply to a student prototype exactly as they apply to a company.</a:t>
+              <a:t>Consultation content is sensitive personal data. Informed consent, purpose limitation and deletion rights apply to an early-stage product exactly as they apply to an established company.</a:t>
             </a:r>
             <a:endParaRPr lang="en-US" sz="1200" dirty="0"/>
           </a:p>
@@ -4936,6 +4976,10 @@
             </a:outerShdw>
           </a:effectLst>
         </p:spPr>
+        <p:txBody>
+          <a:bodyPr/>
+          <a:p/>
+        </p:txBody>
       </p:sp>
       <p:sp>
         <p:nvSpPr>
@@ -10004,7 +10048,7 @@
                 <a:ea typeface="Calibri" pitchFamily="34" charset="-122"/>
                 <a:cs typeface="Calibri" pitchFamily="34" charset="-120"/>
               </a:rPr>
-              <a:t>Krishnanagar is the evidence. ClinicOS is built by Varaxis to scale — nationally, then internationally.</a:t>
+              <a:t>This began in one rural clinic. ClinicOS is built by Varaxis to scale — nationally, then internationally.</a:t>
             </a:r>
             <a:endParaRPr lang="en-US" sz="1400" dirty="0"/>
           </a:p>
@@ -10795,6 +10839,10 @@
             <a:prstDash val="solid"/>
           </a:ln>
         </p:spPr>
+        <p:txBody>
+          <a:bodyPr/>
+          <a:p/>
+        </p:txBody>
       </p:sp>
       <p:sp>
         <p:nvSpPr>
@@ -10854,6 +10902,10 @@
           </a:solidFill>
           <a:ln/>
         </p:spPr>
+        <p:txBody>
+          <a:bodyPr/>
+          <a:p/>
+        </p:txBody>
       </p:sp>
       <p:sp>
         <p:nvSpPr>
@@ -10874,6 +10926,10 @@
           </a:solidFill>
           <a:ln/>
         </p:spPr>
+        <p:txBody>
+          <a:bodyPr/>
+          <a:p/>
+        </p:txBody>
       </p:sp>
       <p:sp>
         <p:nvSpPr>
@@ -10894,6 +10950,10 @@
           </a:solidFill>
           <a:ln/>
         </p:spPr>
+        <p:txBody>
+          <a:bodyPr/>
+          <a:p/>
+        </p:txBody>
       </p:sp>
       <p:sp>
         <p:nvSpPr>
@@ -10914,6 +10974,10 @@
           </a:solidFill>
           <a:ln/>
         </p:spPr>
+        <p:txBody>
+          <a:bodyPr/>
+          <a:p/>
+        </p:txBody>
       </p:sp>
       <p:sp>
         <p:nvSpPr>
@@ -10934,6 +10998,10 @@
           </a:solidFill>
           <a:ln/>
         </p:spPr>
+        <p:txBody>
+          <a:bodyPr/>
+          <a:p/>
+        </p:txBody>
       </p:sp>
       <p:sp>
         <p:nvSpPr>
@@ -11395,6 +11463,10 @@
             <a:prstDash val="solid"/>
           </a:ln>
         </p:spPr>
+        <p:txBody>
+          <a:bodyPr/>
+          <a:p/>
+        </p:txBody>
       </p:sp>
       <p:sp>
         <p:nvSpPr>
@@ -11429,7 +11501,7 @@
                 <a:ea typeface="Calibri" pitchFamily="34" charset="-122"/>
                 <a:cs typeface="Calibri" pitchFamily="34" charset="-120"/>
               </a:rPr>
-              <a:t>Thank you  ·  Ishaan Seal</a:t>
+              <a:t>Thank you  ·  Varaxis</a:t>
             </a:r>
             <a:endParaRPr lang="en-US" sz="1400" dirty="0"/>
           </a:p>
@@ -11723,7 +11795,7 @@
                 <a:ea typeface="Calibri" pitchFamily="34" charset="-122"/>
                 <a:cs typeface="Calibri" pitchFamily="34" charset="-120"/>
               </a:rPr>
-              <a:t>Field site: Krishnanagar, Nadia, West Bengal — the starting point, not the limit.</a:t>
+              <a:t>Where this began: a single-doctor rural clinic — the starting point, not the limit.</a:t>
             </a:r>
             <a:endParaRPr lang="en-US" sz="1250" dirty="0"/>
           </a:p>
@@ -16308,6 +16380,10 @@
             <a:prstDash val="solid"/>
           </a:ln>
         </p:spPr>
+        <p:txBody>
+          <a:bodyPr/>
+          <a:p/>
+        </p:txBody>
       </p:sp>
       <p:sp>
         <p:nvSpPr>
@@ -16445,6 +16521,10 @@
           </a:solidFill>
           <a:ln/>
         </p:spPr>
+        <p:txBody>
+          <a:bodyPr/>
+          <a:p/>
+        </p:txBody>
       </p:sp>
       <p:sp>
         <p:nvSpPr>
@@ -16465,6 +16545,10 @@
           </a:solidFill>
           <a:ln/>
         </p:spPr>
+        <p:txBody>
+          <a:bodyPr/>
+          <a:p/>
+        </p:txBody>
       </p:sp>
       <p:sp>
         <p:nvSpPr>
@@ -16485,6 +16569,10 @@
           </a:solidFill>
           <a:ln/>
         </p:spPr>
+        <p:txBody>
+          <a:bodyPr/>
+          <a:p/>
+        </p:txBody>
       </p:sp>
       <p:sp>
         <p:nvSpPr>
@@ -16505,6 +16593,10 @@
           </a:solidFill>
           <a:ln/>
         </p:spPr>
+        <p:txBody>
+          <a:bodyPr/>
+          <a:p/>
+        </p:txBody>
       </p:sp>
       <p:sp>
         <p:nvSpPr>
@@ -16525,6 +16617,10 @@
           </a:solidFill>
           <a:ln/>
         </p:spPr>
+        <p:txBody>
+          <a:bodyPr/>
+          <a:p/>
+        </p:txBody>
       </p:sp>
       <p:sp>
         <p:nvSpPr>
@@ -16554,6 +16650,10 @@
             </a:outerShdw>
           </a:effectLst>
         </p:spPr>
+        <p:txBody>
+          <a:bodyPr/>
+          <a:p/>
+        </p:txBody>
       </p:sp>
       <p:sp>
         <p:nvSpPr>
@@ -16574,6 +16674,10 @@
           </a:solidFill>
           <a:ln/>
         </p:spPr>
+        <p:txBody>
+          <a:bodyPr/>
+          <a:p/>
+        </p:txBody>
       </p:sp>
       <p:sp>
         <p:nvSpPr>
@@ -16686,7 +16790,7 @@
                 <a:ea typeface="Calibri" pitchFamily="34" charset="-122"/>
                 <a:cs typeface="Calibri" pitchFamily="34" charset="-120"/>
               </a:rPr>
-              <a:t>Solo practitioner · Krishnanagar</a:t>
+              <a:t>Solo practitioner · rural India</a:t>
             </a:r>
             <a:endParaRPr lang="en-US" sz="1250" dirty="0"/>
           </a:p>
@@ -16711,6 +16815,10 @@
           </a:solidFill>
           <a:ln/>
         </p:spPr>
+        <p:txBody>
+          <a:bodyPr/>
+          <a:p/>
+        </p:txBody>
       </p:sp>
       <p:sp>
         <p:nvSpPr>
@@ -16770,6 +16878,10 @@
           </a:solidFill>
           <a:ln/>
         </p:spPr>
+        <p:txBody>
+          <a:bodyPr/>
+          <a:p/>
+        </p:txBody>
       </p:sp>
       <p:sp>
         <p:nvSpPr>
@@ -16829,6 +16941,10 @@
           </a:solidFill>
           <a:ln/>
         </p:spPr>
+        <p:txBody>
+          <a:bodyPr/>
+          <a:p/>
+        </p:txBody>
       </p:sp>
       <p:sp>
         <p:nvSpPr>
@@ -16888,6 +17004,10 @@
           </a:solidFill>
           <a:ln/>
         </p:spPr>
+        <p:txBody>
+          <a:bodyPr/>
+          <a:p/>
+        </p:txBody>
       </p:sp>
       <p:sp>
         <p:nvSpPr>
@@ -16961,6 +17081,10 @@
             </a:outerShdw>
           </a:effectLst>
         </p:spPr>
+        <p:txBody>
+          <a:bodyPr/>
+          <a:p/>
+        </p:txBody>
       </p:sp>
       <p:sp>
         <p:nvSpPr>
@@ -17076,6 +17200,10 @@
             </a:outerShdw>
           </a:effectLst>
         </p:spPr>
+        <p:txBody>
+          <a:bodyPr/>
+          <a:p/>
+        </p:txBody>
       </p:sp>
       <p:sp>
         <p:nvSpPr>
@@ -17179,6 +17307,10 @@
           </a:solidFill>
           <a:ln/>
         </p:spPr>
+        <p:txBody>
+          <a:bodyPr/>
+          <a:p/>
+        </p:txBody>
       </p:sp>
       <p:sp>
         <p:nvSpPr>

--- a/artifacts/ClinicOS_DesignThinking_Deck.pptx
+++ b/artifacts/ClinicOS_DesignThinking_Deck.pptx
@@ -2616,7 +2616,7 @@
                 <a:ea typeface="Calibri" pitchFamily="34" charset="-122"/>
                 <a:cs typeface="Calibri" pitchFamily="34" charset="-120"/>
               </a:rPr>
-              <a:t>Built by Varaxis to work at the scale of the whole country, and in time, beyond it — this design-thinking case study traces the evidence back to where it started: a single-doctor rural clinic, one room, one doctor, one register.</a:t>
+              <a:t>A design-thinking case study that starts with a single-doctor rural clinic — one room, one doctor, one register — and follows the evidence toward a platform Varaxis is scaling nationally, then internationally.</a:t>
             </a:r>
             <a:endParaRPr lang="en-US" sz="1450" dirty="0"/>
           </a:p>
@@ -2694,7 +2694,7 @@
                 <a:ea typeface="Calibri" pitchFamily="34" charset="-122"/>
                 <a:cs typeface="Calibri" pitchFamily="34" charset="-120"/>
               </a:rPr>
-              <a:t>National reach today. Global reach ahead.</a:t>
+              <a:t>Healthcare Technology</a:t>
             </a:r>
             <a:endParaRPr lang="en-US" sz="1200" dirty="0"/>
           </a:p>

--- a/artifacts/ClinicOS_DesignThinking_Deck.pptx
+++ b/artifacts/ClinicOS_DesignThinking_Deck.pptx
@@ -2616,7 +2616,7 @@
                 <a:ea typeface="Calibri" pitchFamily="34" charset="-122"/>
                 <a:cs typeface="Calibri" pitchFamily="34" charset="-120"/>
               </a:rPr>
-              <a:t>A design-thinking case study that starts with a single-doctor rural clinic — one room, one doctor, one register — and follows the evidence toward a platform Varaxis is scaling nationally, then internationally.</a:t>
+              <a:t>A design-thinking case study of one product built to grow: from the single-doctor clinic to multi-doctor clinics, hospitals and health systems, and then internationally.</a:t>
             </a:r>
             <a:endParaRPr lang="en-US" sz="1450" dirty="0"/>
           </a:p>
@@ -3129,6 +3129,10 @@
             <a:prstDash val="solid"/>
           </a:ln>
         </p:spPr>
+        <p:txBody>
+          <a:bodyPr/>
+          <a:p/>
+        </p:txBody>
       </p:sp>
       <p:sp>
         <p:nvSpPr>
@@ -3188,6 +3192,10 @@
           </a:solidFill>
           <a:ln/>
         </p:spPr>
+        <p:txBody>
+          <a:bodyPr/>
+          <a:p/>
+        </p:txBody>
       </p:sp>
       <p:sp>
         <p:nvSpPr>
@@ -3208,6 +3216,10 @@
           </a:solidFill>
           <a:ln/>
         </p:spPr>
+        <p:txBody>
+          <a:bodyPr/>
+          <a:p/>
+        </p:txBody>
       </p:sp>
       <p:sp>
         <p:nvSpPr>
@@ -3228,6 +3240,10 @@
           </a:solidFill>
           <a:ln/>
         </p:spPr>
+        <p:txBody>
+          <a:bodyPr/>
+          <a:p/>
+        </p:txBody>
       </p:sp>
       <p:sp>
         <p:nvSpPr>
@@ -3248,6 +3264,10 @@
           </a:solidFill>
           <a:ln/>
         </p:spPr>
+        <p:txBody>
+          <a:bodyPr/>
+          <a:p/>
+        </p:txBody>
       </p:sp>
       <p:sp>
         <p:nvSpPr>
@@ -3268,6 +3288,10 @@
           </a:solidFill>
           <a:ln/>
         </p:spPr>
+        <p:txBody>
+          <a:bodyPr/>
+          <a:p/>
+        </p:txBody>
       </p:sp>
       <p:sp>
         <p:nvSpPr>
@@ -3344,7 +3368,7 @@
                 <a:ea typeface="Cambria" pitchFamily="34" charset="-122"/>
                 <a:cs typeface="Cambria" pitchFamily="34" charset="-120"/>
               </a:rPr>
-              <a:t>In single-doctor rural clinics, a consultation lasting roughly two minutes must produce both care and a record — and the record is routinely the part sacrificed. Existing software answers this by asking the doctor to type during the visit, which measurably consumes more clinical attention than paper does, and is abandoned. Clinics are left with no usable history, unsystematic follow-up, and years of records resting on a single register or a single laptop.</a:t>
+              <a:t>In busy outpatient practice — starting with the single-doctor clinic — a consultation lasting roughly two minutes must produce both care and a record, and the record is routinely the part sacrificed. Existing software answers this by asking the doctor to type during the visit, which measurably consumes more clinical attention than paper does, and is abandoned. Clinics are left with no usable history, unsystematic follow-up, and years of records resting on a single register or a single laptop.</a:t>
             </a:r>
             <a:endParaRPr lang="en-US" sz="2500" dirty="0"/>
           </a:p>
@@ -3372,6 +3396,10 @@
             <a:prstDash val="solid"/>
           </a:ln>
         </p:spPr>
+        <p:txBody>
+          <a:bodyPr/>
+          <a:p/>
+        </p:txBody>
       </p:sp>
       <p:sp>
         <p:nvSpPr>
@@ -3464,6 +3492,10 @@
             <a:prstDash val="solid"/>
           </a:ln>
         </p:spPr>
+        <p:txBody>
+          <a:bodyPr/>
+          <a:p/>
+        </p:txBody>
       </p:sp>
       <p:sp>
         <p:nvSpPr>
@@ -3601,6 +3633,10 @@
           </a:solidFill>
           <a:ln/>
         </p:spPr>
+        <p:txBody>
+          <a:bodyPr/>
+          <a:p/>
+        </p:txBody>
       </p:sp>
       <p:sp>
         <p:nvSpPr>
@@ -3621,6 +3657,10 @@
           </a:solidFill>
           <a:ln/>
         </p:spPr>
+        <p:txBody>
+          <a:bodyPr/>
+          <a:p/>
+        </p:txBody>
       </p:sp>
       <p:sp>
         <p:nvSpPr>
@@ -3641,6 +3681,10 @@
           </a:solidFill>
           <a:ln/>
         </p:spPr>
+        <p:txBody>
+          <a:bodyPr/>
+          <a:p/>
+        </p:txBody>
       </p:sp>
       <p:sp>
         <p:nvSpPr>
@@ -3661,6 +3705,10 @@
           </a:solidFill>
           <a:ln/>
         </p:spPr>
+        <p:txBody>
+          <a:bodyPr/>
+          <a:p/>
+        </p:txBody>
       </p:sp>
       <p:sp>
         <p:nvSpPr>
@@ -3681,6 +3729,10 @@
           </a:solidFill>
           <a:ln/>
         </p:spPr>
+        <p:txBody>
+          <a:bodyPr/>
+          <a:p/>
+        </p:txBody>
       </p:sp>
       <p:sp>
         <p:nvSpPr>
@@ -3703,6 +3755,10 @@
           </a:solidFill>
           <a:ln/>
         </p:spPr>
+        <p:txBody>
+          <a:bodyPr/>
+          <a:p/>
+        </p:txBody>
       </p:sp>
       <p:sp>
         <p:nvSpPr>
@@ -3857,6 +3913,10 @@
             </a:outerShdw>
           </a:effectLst>
         </p:spPr>
+        <p:txBody>
+          <a:bodyPr/>
+          <a:p/>
+        </p:txBody>
       </p:sp>
       <p:sp>
         <p:nvSpPr>
@@ -3972,6 +4032,10 @@
             </a:outerShdw>
           </a:effectLst>
         </p:spPr>
+        <p:txBody>
+          <a:bodyPr/>
+          <a:p/>
+        </p:txBody>
       </p:sp>
       <p:sp>
         <p:nvSpPr>
@@ -4087,6 +4151,10 @@
             </a:outerShdw>
           </a:effectLst>
         </p:spPr>
+        <p:txBody>
+          <a:bodyPr/>
+          <a:p/>
+        </p:txBody>
       </p:sp>
       <p:sp>
         <p:nvSpPr>
@@ -4202,6 +4270,10 @@
             </a:outerShdw>
           </a:effectLst>
         </p:spPr>
+        <p:txBody>
+          <a:bodyPr/>
+          <a:p/>
+        </p:txBody>
       </p:sp>
       <p:sp>
         <p:nvSpPr>
@@ -5588,6 +5660,10 @@
             <a:prstDash val="solid"/>
           </a:ln>
         </p:spPr>
+        <p:txBody>
+          <a:bodyPr/>
+          <a:p/>
+        </p:txBody>
       </p:sp>
       <p:sp>
         <p:nvSpPr>
@@ -5725,6 +5801,10 @@
           </a:solidFill>
           <a:ln/>
         </p:spPr>
+        <p:txBody>
+          <a:bodyPr/>
+          <a:p/>
+        </p:txBody>
       </p:sp>
       <p:sp>
         <p:nvSpPr>
@@ -5745,6 +5825,10 @@
           </a:solidFill>
           <a:ln/>
         </p:spPr>
+        <p:txBody>
+          <a:bodyPr/>
+          <a:p/>
+        </p:txBody>
       </p:sp>
       <p:sp>
         <p:nvSpPr>
@@ -5765,6 +5849,10 @@
           </a:solidFill>
           <a:ln/>
         </p:spPr>
+        <p:txBody>
+          <a:bodyPr/>
+          <a:p/>
+        </p:txBody>
       </p:sp>
       <p:sp>
         <p:nvSpPr>
@@ -5785,6 +5873,10 @@
           </a:solidFill>
           <a:ln/>
         </p:spPr>
+        <p:txBody>
+          <a:bodyPr/>
+          <a:p/>
+        </p:txBody>
       </p:sp>
       <p:sp>
         <p:nvSpPr>
@@ -5805,6 +5897,10 @@
           </a:solidFill>
           <a:ln/>
         </p:spPr>
+        <p:txBody>
+          <a:bodyPr/>
+          <a:p/>
+        </p:txBody>
       </p:sp>
       <p:sp>
         <p:nvSpPr>
@@ -5832,6 +5928,10 @@
             <a:prstDash val="solid"/>
           </a:ln>
         </p:spPr>
+        <p:txBody>
+          <a:bodyPr/>
+          <a:p/>
+        </p:txBody>
       </p:sp>
       <p:sp>
         <p:nvSpPr>
@@ -5852,6 +5952,10 @@
           </a:solidFill>
           <a:ln/>
         </p:spPr>
+        <p:txBody>
+          <a:bodyPr/>
+          <a:p/>
+        </p:txBody>
       </p:sp>
       <p:sp>
         <p:nvSpPr>
@@ -5999,6 +6103,10 @@
             <a:prstDash val="solid"/>
           </a:ln>
         </p:spPr>
+        <p:txBody>
+          <a:bodyPr/>
+          <a:p/>
+        </p:txBody>
       </p:sp>
       <p:sp>
         <p:nvSpPr>
@@ -6019,6 +6127,10 @@
           </a:solidFill>
           <a:ln/>
         </p:spPr>
+        <p:txBody>
+          <a:bodyPr/>
+          <a:p/>
+        </p:txBody>
       </p:sp>
       <p:sp>
         <p:nvSpPr>
@@ -6166,6 +6278,10 @@
             <a:prstDash val="solid"/>
           </a:ln>
         </p:spPr>
+        <p:txBody>
+          <a:bodyPr/>
+          <a:p/>
+        </p:txBody>
       </p:sp>
       <p:sp>
         <p:nvSpPr>
@@ -6186,6 +6302,10 @@
           </a:solidFill>
           <a:ln/>
         </p:spPr>
+        <p:txBody>
+          <a:bodyPr/>
+          <a:p/>
+        </p:txBody>
       </p:sp>
       <p:sp>
         <p:nvSpPr>
@@ -6335,6 +6455,10 @@
             </a:outerShdw>
           </a:effectLst>
         </p:spPr>
+        <p:txBody>
+          <a:bodyPr/>
+          <a:p/>
+        </p:txBody>
       </p:sp>
       <p:sp>
         <p:nvSpPr>
@@ -6355,6 +6479,10 @@
           </a:solidFill>
           <a:ln/>
         </p:spPr>
+        <p:txBody>
+          <a:bodyPr/>
+          <a:p/>
+        </p:txBody>
       </p:sp>
       <p:sp>
         <p:nvSpPr>
@@ -6564,6 +6692,10 @@
             <a:prstDash val="solid"/>
           </a:ln>
         </p:spPr>
+        <p:txBody>
+          <a:bodyPr/>
+          <a:p/>
+        </p:txBody>
       </p:sp>
       <p:sp>
         <p:nvSpPr>
@@ -6701,6 +6833,10 @@
           </a:solidFill>
           <a:ln/>
         </p:spPr>
+        <p:txBody>
+          <a:bodyPr/>
+          <a:p/>
+        </p:txBody>
       </p:sp>
       <p:sp>
         <p:nvSpPr>
@@ -6721,6 +6857,10 @@
           </a:solidFill>
           <a:ln/>
         </p:spPr>
+        <p:txBody>
+          <a:bodyPr/>
+          <a:p/>
+        </p:txBody>
       </p:sp>
       <p:sp>
         <p:nvSpPr>
@@ -6741,6 +6881,10 @@
           </a:solidFill>
           <a:ln/>
         </p:spPr>
+        <p:txBody>
+          <a:bodyPr/>
+          <a:p/>
+        </p:txBody>
       </p:sp>
       <p:sp>
         <p:nvSpPr>
@@ -6761,6 +6905,10 @@
           </a:solidFill>
           <a:ln/>
         </p:spPr>
+        <p:txBody>
+          <a:bodyPr/>
+          <a:p/>
+        </p:txBody>
       </p:sp>
       <p:sp>
         <p:nvSpPr>
@@ -6781,6 +6929,10 @@
           </a:solidFill>
           <a:ln/>
         </p:spPr>
+        <p:txBody>
+          <a:bodyPr/>
+          <a:p/>
+        </p:txBody>
       </p:sp>
       <p:sp>
         <p:nvSpPr>
@@ -6854,6 +7006,10 @@
             </a:outerShdw>
           </a:effectLst>
         </p:spPr>
+        <p:txBody>
+          <a:bodyPr/>
+          <a:p/>
+        </p:txBody>
       </p:sp>
       <p:sp>
         <p:nvSpPr>
@@ -6874,6 +7030,10 @@
           </a:solidFill>
           <a:ln/>
         </p:spPr>
+        <p:txBody>
+          <a:bodyPr/>
+          <a:p/>
+        </p:txBody>
       </p:sp>
       <p:pic>
         <p:nvPicPr>
@@ -7011,6 +7171,10 @@
             </a:outerShdw>
           </a:effectLst>
         </p:spPr>
+        <p:txBody>
+          <a:bodyPr/>
+          <a:p/>
+        </p:txBody>
       </p:sp>
       <p:sp>
         <p:nvSpPr>
@@ -7031,6 +7195,10 @@
           </a:solidFill>
           <a:ln/>
         </p:spPr>
+        <p:txBody>
+          <a:bodyPr/>
+          <a:p/>
+        </p:txBody>
       </p:sp>
       <p:pic>
         <p:nvPicPr>
@@ -7173,6 +7341,10 @@
             </a:outerShdw>
           </a:effectLst>
         </p:spPr>
+        <p:txBody>
+          <a:bodyPr/>
+          <a:p/>
+        </p:txBody>
       </p:sp>
       <p:sp>
         <p:nvSpPr>
@@ -7193,6 +7365,10 @@
           </a:solidFill>
           <a:ln/>
         </p:spPr>
+        <p:txBody>
+          <a:bodyPr/>
+          <a:p/>
+        </p:txBody>
       </p:sp>
       <p:pic>
         <p:nvPicPr>
@@ -7335,6 +7511,10 @@
             </a:outerShdw>
           </a:effectLst>
         </p:spPr>
+        <p:txBody>
+          <a:bodyPr/>
+          <a:p/>
+        </p:txBody>
       </p:sp>
       <p:sp>
         <p:nvSpPr>
@@ -7355,6 +7535,10 @@
           </a:solidFill>
           <a:ln/>
         </p:spPr>
+        <p:txBody>
+          <a:bodyPr/>
+          <a:p/>
+        </p:txBody>
       </p:sp>
       <p:pic>
         <p:nvPicPr>
@@ -7513,6 +7697,10 @@
             <a:prstDash val="solid"/>
           </a:ln>
         </p:spPr>
+        <p:txBody>
+          <a:bodyPr/>
+          <a:p/>
+        </p:txBody>
       </p:sp>
       <p:sp>
         <p:nvSpPr>
@@ -7650,6 +7838,10 @@
           </a:solidFill>
           <a:ln/>
         </p:spPr>
+        <p:txBody>
+          <a:bodyPr/>
+          <a:p/>
+        </p:txBody>
       </p:sp>
       <p:sp>
         <p:nvSpPr>
@@ -7670,6 +7862,10 @@
           </a:solidFill>
           <a:ln/>
         </p:spPr>
+        <p:txBody>
+          <a:bodyPr/>
+          <a:p/>
+        </p:txBody>
       </p:sp>
       <p:sp>
         <p:nvSpPr>
@@ -7690,6 +7886,10 @@
           </a:solidFill>
           <a:ln/>
         </p:spPr>
+        <p:txBody>
+          <a:bodyPr/>
+          <a:p/>
+        </p:txBody>
       </p:sp>
       <p:sp>
         <p:nvSpPr>
@@ -7710,6 +7910,10 @@
           </a:solidFill>
           <a:ln/>
         </p:spPr>
+        <p:txBody>
+          <a:bodyPr/>
+          <a:p/>
+        </p:txBody>
       </p:sp>
       <p:sp>
         <p:nvSpPr>
@@ -7730,6 +7934,10 @@
           </a:solidFill>
           <a:ln/>
         </p:spPr>
+        <p:txBody>
+          <a:bodyPr/>
+          <a:p/>
+        </p:txBody>
       </p:sp>
       <p:pic>
         <p:nvPicPr>
@@ -8135,6 +8343,10 @@
             <a:prstDash val="solid"/>
           </a:ln>
         </p:spPr>
+        <p:txBody>
+          <a:bodyPr/>
+          <a:p/>
+        </p:txBody>
       </p:sp>
       <p:sp>
         <p:nvSpPr>
@@ -8272,6 +8484,10 @@
           </a:solidFill>
           <a:ln/>
         </p:spPr>
+        <p:txBody>
+          <a:bodyPr/>
+          <a:p/>
+        </p:txBody>
       </p:sp>
       <p:sp>
         <p:nvSpPr>
@@ -8292,6 +8508,10 @@
           </a:solidFill>
           <a:ln/>
         </p:spPr>
+        <p:txBody>
+          <a:bodyPr/>
+          <a:p/>
+        </p:txBody>
       </p:sp>
       <p:sp>
         <p:nvSpPr>
@@ -8312,6 +8532,10 @@
           </a:solidFill>
           <a:ln/>
         </p:spPr>
+        <p:txBody>
+          <a:bodyPr/>
+          <a:p/>
+        </p:txBody>
       </p:sp>
       <p:sp>
         <p:nvSpPr>
@@ -8332,6 +8556,10 @@
           </a:solidFill>
           <a:ln/>
         </p:spPr>
+        <p:txBody>
+          <a:bodyPr/>
+          <a:p/>
+        </p:txBody>
       </p:sp>
       <p:sp>
         <p:nvSpPr>
@@ -8352,6 +8580,10 @@
           </a:solidFill>
           <a:ln/>
         </p:spPr>
+        <p:txBody>
+          <a:bodyPr/>
+          <a:p/>
+        </p:txBody>
       </p:sp>
       <p:pic>
         <p:nvPicPr>
@@ -8490,6 +8722,10 @@
             </a:outerShdw>
           </a:effectLst>
         </p:spPr>
+        <p:txBody>
+          <a:bodyPr/>
+          <a:p/>
+        </p:txBody>
       </p:sp>
       <p:sp>
         <p:nvSpPr>
@@ -8593,6 +8829,10 @@
           </a:solidFill>
           <a:ln/>
         </p:spPr>
+        <p:txBody>
+          <a:bodyPr/>
+          <a:p/>
+        </p:txBody>
       </p:sp>
       <p:sp>
         <p:nvSpPr>
@@ -8696,6 +8936,10 @@
           </a:solidFill>
           <a:ln/>
         </p:spPr>
+        <p:txBody>
+          <a:bodyPr/>
+          <a:p/>
+        </p:txBody>
       </p:sp>
       <p:sp>
         <p:nvSpPr>
@@ -8827,6 +9071,10 @@
             <a:prstDash val="solid"/>
           </a:ln>
         </p:spPr>
+        <p:txBody>
+          <a:bodyPr/>
+          <a:p/>
+        </p:txBody>
       </p:sp>
       <p:sp>
         <p:nvSpPr>
@@ -8964,6 +9212,10 @@
           </a:solidFill>
           <a:ln/>
         </p:spPr>
+        <p:txBody>
+          <a:bodyPr/>
+          <a:p/>
+        </p:txBody>
       </p:sp>
       <p:sp>
         <p:nvSpPr>
@@ -8984,6 +9236,10 @@
           </a:solidFill>
           <a:ln/>
         </p:spPr>
+        <p:txBody>
+          <a:bodyPr/>
+          <a:p/>
+        </p:txBody>
       </p:sp>
       <p:sp>
         <p:nvSpPr>
@@ -9004,6 +9260,10 @@
           </a:solidFill>
           <a:ln/>
         </p:spPr>
+        <p:txBody>
+          <a:bodyPr/>
+          <a:p/>
+        </p:txBody>
       </p:sp>
       <p:sp>
         <p:nvSpPr>
@@ -9024,6 +9284,10 @@
           </a:solidFill>
           <a:ln/>
         </p:spPr>
+        <p:txBody>
+          <a:bodyPr/>
+          <a:p/>
+        </p:txBody>
       </p:sp>
       <p:sp>
         <p:nvSpPr>
@@ -9044,6 +9308,10 @@
           </a:solidFill>
           <a:ln/>
         </p:spPr>
+        <p:txBody>
+          <a:bodyPr/>
+          <a:p/>
+        </p:txBody>
       </p:sp>
       <p:sp>
         <p:nvSpPr>
@@ -9117,6 +9385,10 @@
             </a:outerShdw>
           </a:effectLst>
         </p:spPr>
+        <p:txBody>
+          <a:bodyPr/>
+          <a:p/>
+        </p:txBody>
       </p:sp>
       <p:sp>
         <p:nvSpPr>
@@ -9313,6 +9585,10 @@
             </a:outerShdw>
           </a:effectLst>
         </p:spPr>
+        <p:txBody>
+          <a:bodyPr/>
+          <a:p/>
+        </p:txBody>
       </p:sp>
       <p:sp>
         <p:nvSpPr>
@@ -9504,6 +9780,10 @@
             </a:outerShdw>
           </a:effectLst>
         </p:spPr>
+        <p:txBody>
+          <a:bodyPr/>
+          <a:p/>
+        </p:txBody>
       </p:sp>
       <p:sp>
         <p:nvSpPr>
@@ -9688,6 +9968,10 @@
           </a:solidFill>
           <a:ln/>
         </p:spPr>
+        <p:txBody>
+          <a:bodyPr/>
+          <a:p/>
+        </p:txBody>
       </p:sp>
       <p:sp>
         <p:nvSpPr>
@@ -9850,7 +10134,7 @@
                 <a:ea typeface="Cambria" pitchFamily="34" charset="-122"/>
                 <a:cs typeface="Cambria" pitchFamily="34" charset="-120"/>
               </a:rPr>
-              <a:t>One room first. Built for the country.</a:t>
+              <a:t>Clinics first. Then the world.</a:t>
             </a:r>
             <a:endParaRPr lang="en-US" sz="3400" dirty="0"/>
           </a:p>
@@ -10048,7 +10332,7 @@
                 <a:ea typeface="Calibri" pitchFamily="34" charset="-122"/>
                 <a:cs typeface="Calibri" pitchFamily="34" charset="-120"/>
               </a:rPr>
-              <a:t>This began in one rural clinic. ClinicOS is built by Varaxis to scale — nationally, then internationally.</a:t>
+              <a:t>Single-doctor clinics first, then multi-doctor clinics, hospitals and health systems, then international markets.</a:t>
             </a:r>
             <a:endParaRPr lang="en-US" sz="1400" dirty="0"/>
           </a:p>
@@ -11672,7 +11956,7 @@
                 <a:ea typeface="Cambria" pitchFamily="34" charset="-122"/>
                 <a:cs typeface="Cambria" pitchFamily="34" charset="-120"/>
               </a:rPr>
-              <a:t>One room, one doctor, one register</a:t>
+              <a:t>One consultation, every size of institution</a:t>
             </a:r>
             <a:endParaRPr lang="en-US" sz="3400" dirty="0"/>
           </a:p>
@@ -11714,7 +11998,7 @@
                 <a:ea typeface="Calibri" pitchFamily="34" charset="-122"/>
                 <a:cs typeface="Calibri" pitchFamily="34" charset="-120"/>
               </a:rPr>
-              <a:t>Indian rural primary care runs on very small units. Alongside the public network of health centres sits a far larger, largely uncounted layer of private single-doctor chambers: one room, one doctor, a paper register and a queue outside.</a:t>
+              <a:t>Outpatient care runs under time pressure everywhere, and in India it is extreme. Patients are seen in public health centres, private solo chambers, multi-doctor clinics and hospital outpatient departments — the same short consultation in every one.</a:t>
             </a:r>
             <a:endParaRPr lang="en-US" sz="1500" dirty="0"/>
           </a:p>
@@ -11756,7 +12040,7 @@
                 <a:ea typeface="Calibri" pitchFamily="34" charset="-122"/>
                 <a:cs typeface="Calibri" pitchFamily="34" charset="-120"/>
               </a:rPr>
-              <a:t>That chamber is the unit this project studies — it is where the largest number of Indian patients are seen, and almost no clinical software is built for it. It is also where Varaxis's national ambitions for this product begin.</a:t>
+              <a:t>The unit this project studies is the consultation itself. It starts with the single-doctor clinic, where the whole visit rests on one person, and grows into multi-doctor clinics, hospitals and health systems.</a:t>
             </a:r>
             <a:endParaRPr lang="en-US" sz="1500" dirty="0"/>
           </a:p>
@@ -11795,7 +12079,7 @@
                 <a:ea typeface="Calibri" pitchFamily="34" charset="-122"/>
                 <a:cs typeface="Calibri" pitchFamily="34" charset="-120"/>
               </a:rPr>
-              <a:t>Where this began: a single-doctor rural clinic — the starting point, not the limit.</a:t>
+              <a:t>First rung: the single-doctor clinic. Then larger institutions, then international.</a:t>
             </a:r>
             <a:endParaRPr lang="en-US" sz="1250" dirty="0"/>
           </a:p>
@@ -11902,7 +12186,7 @@
                 <a:ea typeface="Calibri" pitchFamily="34" charset="-122"/>
                 <a:cs typeface="Calibri" pitchFamily="34" charset="-120"/>
               </a:rPr>
-              <a:t>Primary Health Centres across rural India</a:t>
+              <a:t>Primary Health Centres across India</a:t>
             </a:r>
             <a:endParaRPr lang="en-US" sz="1250" dirty="0"/>
           </a:p>
@@ -12123,7 +12407,7 @@
                 <a:ea typeface="Calibri" pitchFamily="34" charset="-122"/>
                 <a:cs typeface="Calibri" pitchFamily="34" charset="-120"/>
               </a:rPr>
-              <a:t>doctors per centre — the scale we design for</a:t>
+              <a:t>doctors per public health centre — time is scarce</a:t>
             </a:r>
             <a:endParaRPr lang="en-US" sz="1250" dirty="0"/>
           </a:p>
@@ -12217,6 +12501,10 @@
             <a:prstDash val="solid"/>
           </a:ln>
         </p:spPr>
+        <p:txBody>
+          <a:bodyPr/>
+          <a:p/>
+        </p:txBody>
       </p:sp>
       <p:sp>
         <p:nvSpPr>
@@ -12357,6 +12645,10 @@
             <a:prstDash val="solid"/>
           </a:ln>
         </p:spPr>
+        <p:txBody>
+          <a:bodyPr/>
+          <a:p/>
+        </p:txBody>
       </p:sp>
       <p:sp>
         <p:nvSpPr>
@@ -12389,6 +12681,10 @@
             </a:outerShdw>
           </a:effectLst>
         </p:spPr>
+        <p:txBody>
+          <a:bodyPr/>
+          <a:p/>
+        </p:txBody>
       </p:sp>
       <p:sp>
         <p:nvSpPr>
@@ -12581,6 +12877,10 @@
             </a:outerShdw>
           </a:effectLst>
         </p:spPr>
+        <p:txBody>
+          <a:bodyPr/>
+          <a:p/>
+        </p:txBody>
       </p:sp>
       <p:sp>
         <p:nvSpPr>
@@ -12773,6 +13073,10 @@
             </a:outerShdw>
           </a:effectLst>
         </p:spPr>
+        <p:txBody>
+          <a:bodyPr/>
+          <a:p/>
+        </p:txBody>
       </p:sp>
       <p:sp>
         <p:nvSpPr>
@@ -12965,6 +13269,10 @@
             </a:outerShdw>
           </a:effectLst>
         </p:spPr>
+        <p:txBody>
+          <a:bodyPr/>
+          <a:p/>
+        </p:txBody>
       </p:sp>
       <p:sp>
         <p:nvSpPr>
@@ -13137,6 +13445,10 @@
             </a:outerShdw>
           </a:effectLst>
         </p:spPr>
+        <p:txBody>
+          <a:bodyPr/>
+          <a:p/>
+        </p:txBody>
       </p:sp>
       <p:sp>
         <p:nvSpPr>
@@ -13386,6 +13698,10 @@
             <a:prstDash val="solid"/>
           </a:ln>
         </p:spPr>
+        <p:txBody>
+          <a:bodyPr/>
+          <a:p/>
+        </p:txBody>
       </p:sp>
       <p:sp>
         <p:nvSpPr>
@@ -13523,6 +13839,10 @@
           </a:solidFill>
           <a:ln/>
         </p:spPr>
+        <p:txBody>
+          <a:bodyPr/>
+          <a:p/>
+        </p:txBody>
       </p:sp>
       <p:sp>
         <p:nvSpPr>
@@ -13543,6 +13863,10 @@
           </a:solidFill>
           <a:ln/>
         </p:spPr>
+        <p:txBody>
+          <a:bodyPr/>
+          <a:p/>
+        </p:txBody>
       </p:sp>
       <p:sp>
         <p:nvSpPr>
@@ -13563,6 +13887,10 @@
           </a:solidFill>
           <a:ln/>
         </p:spPr>
+        <p:txBody>
+          <a:bodyPr/>
+          <a:p/>
+        </p:txBody>
       </p:sp>
       <p:sp>
         <p:nvSpPr>
@@ -13583,6 +13911,10 @@
           </a:solidFill>
           <a:ln/>
         </p:spPr>
+        <p:txBody>
+          <a:bodyPr/>
+          <a:p/>
+        </p:txBody>
       </p:sp>
       <p:sp>
         <p:nvSpPr>
@@ -13603,6 +13935,10 @@
           </a:solidFill>
           <a:ln/>
         </p:spPr>
+        <p:txBody>
+          <a:bodyPr/>
+          <a:p/>
+        </p:txBody>
       </p:sp>
       <p:sp>
         <p:nvSpPr>
@@ -13637,6 +13973,10 @@
             </a:outerShdw>
           </a:effectLst>
         </p:spPr>
+        <p:txBody>
+          <a:bodyPr/>
+          <a:p/>
+        </p:txBody>
       </p:sp>
       <p:sp>
         <p:nvSpPr>
@@ -13657,6 +13997,10 @@
           </a:solidFill>
           <a:ln/>
         </p:spPr>
+        <p:txBody>
+          <a:bodyPr/>
+          <a:p/>
+        </p:txBody>
       </p:sp>
       <p:pic>
         <p:nvPicPr>
@@ -13835,6 +14179,10 @@
             </a:outerShdw>
           </a:effectLst>
         </p:spPr>
+        <p:txBody>
+          <a:bodyPr/>
+          <a:p/>
+        </p:txBody>
       </p:sp>
       <p:sp>
         <p:nvSpPr>
@@ -13855,6 +14203,10 @@
           </a:solidFill>
           <a:ln/>
         </p:spPr>
+        <p:txBody>
+          <a:bodyPr/>
+          <a:p/>
+        </p:txBody>
       </p:sp>
       <p:pic>
         <p:nvPicPr>
@@ -14033,6 +14385,10 @@
             </a:outerShdw>
           </a:effectLst>
         </p:spPr>
+        <p:txBody>
+          <a:bodyPr/>
+          <a:p/>
+        </p:txBody>
       </p:sp>
       <p:sp>
         <p:nvSpPr>
@@ -14053,6 +14409,10 @@
           </a:solidFill>
           <a:ln/>
         </p:spPr>
+        <p:txBody>
+          <a:bodyPr/>
+          <a:p/>
+        </p:txBody>
       </p:sp>
       <p:pic>
         <p:nvPicPr>
@@ -14219,6 +14579,10 @@
           </a:solidFill>
           <a:ln/>
         </p:spPr>
+        <p:txBody>
+          <a:bodyPr/>
+          <a:p/>
+        </p:txBody>
       </p:sp>
       <p:sp>
         <p:nvSpPr>
@@ -14311,6 +14675,10 @@
             <a:prstDash val="solid"/>
           </a:ln>
         </p:spPr>
+        <p:txBody>
+          <a:bodyPr/>
+          <a:p/>
+        </p:txBody>
       </p:sp>
       <p:sp>
         <p:nvSpPr>
@@ -14448,6 +14816,10 @@
           </a:solidFill>
           <a:ln/>
         </p:spPr>
+        <p:txBody>
+          <a:bodyPr/>
+          <a:p/>
+        </p:txBody>
       </p:sp>
       <p:sp>
         <p:nvSpPr>
@@ -14468,6 +14840,10 @@
           </a:solidFill>
           <a:ln/>
         </p:spPr>
+        <p:txBody>
+          <a:bodyPr/>
+          <a:p/>
+        </p:txBody>
       </p:sp>
       <p:sp>
         <p:nvSpPr>
@@ -14488,6 +14864,10 @@
           </a:solidFill>
           <a:ln/>
         </p:spPr>
+        <p:txBody>
+          <a:bodyPr/>
+          <a:p/>
+        </p:txBody>
       </p:sp>
       <p:sp>
         <p:nvSpPr>
@@ -14508,6 +14888,10 @@
           </a:solidFill>
           <a:ln/>
         </p:spPr>
+        <p:txBody>
+          <a:bodyPr/>
+          <a:p/>
+        </p:txBody>
       </p:sp>
       <p:sp>
         <p:nvSpPr>
@@ -14528,6 +14912,10 @@
           </a:solidFill>
           <a:ln/>
         </p:spPr>
+        <p:txBody>
+          <a:bodyPr/>
+          <a:p/>
+        </p:txBody>
       </p:sp>
       <p:sp>
         <p:nvSpPr>
@@ -14550,6 +14938,10 @@
           </a:solidFill>
           <a:ln/>
         </p:spPr>
+        <p:txBody>
+          <a:bodyPr/>
+          <a:p/>
+        </p:txBody>
       </p:sp>
       <p:sp>
         <p:nvSpPr>
@@ -14861,6 +15253,10 @@
             </a:outerShdw>
           </a:effectLst>
         </p:spPr>
+        <p:txBody>
+          <a:bodyPr/>
+          <a:p/>
+        </p:txBody>
       </p:sp>
       <p:sp>
         <p:nvSpPr>
@@ -14920,6 +15316,10 @@
           </a:solidFill>
           <a:ln/>
         </p:spPr>
+        <p:txBody>
+          <a:bodyPr/>
+          <a:p/>
+        </p:txBody>
       </p:sp>
       <p:sp>
         <p:nvSpPr>
@@ -14982,6 +15382,10 @@
           </a:solidFill>
           <a:ln/>
         </p:spPr>
+        <p:txBody>
+          <a:bodyPr/>
+          <a:p/>
+        </p:txBody>
       </p:sp>
       <p:sp>
         <p:nvSpPr>
@@ -15044,6 +15448,10 @@
           </a:solidFill>
           <a:ln/>
         </p:spPr>
+        <p:txBody>
+          <a:bodyPr/>
+          <a:p/>
+        </p:txBody>
       </p:sp>
       <p:sp>
         <p:nvSpPr>
@@ -15106,6 +15514,10 @@
           </a:solidFill>
           <a:ln/>
         </p:spPr>
+        <p:txBody>
+          <a:bodyPr/>
+          <a:p/>
+        </p:txBody>
       </p:sp>
       <p:sp>
         <p:nvSpPr>
@@ -15276,6 +15688,10 @@
             <a:prstDash val="solid"/>
           </a:ln>
         </p:spPr>
+        <p:txBody>
+          <a:bodyPr/>
+          <a:p/>
+        </p:txBody>
       </p:sp>
       <p:sp>
         <p:nvSpPr>
@@ -15413,6 +15829,10 @@
           </a:solidFill>
           <a:ln/>
         </p:spPr>
+        <p:txBody>
+          <a:bodyPr/>
+          <a:p/>
+        </p:txBody>
       </p:sp>
       <p:sp>
         <p:nvSpPr>
@@ -15433,6 +15853,10 @@
           </a:solidFill>
           <a:ln/>
         </p:spPr>
+        <p:txBody>
+          <a:bodyPr/>
+          <a:p/>
+        </p:txBody>
       </p:sp>
       <p:sp>
         <p:nvSpPr>
@@ -15453,6 +15877,10 @@
           </a:solidFill>
           <a:ln/>
         </p:spPr>
+        <p:txBody>
+          <a:bodyPr/>
+          <a:p/>
+        </p:txBody>
       </p:sp>
       <p:sp>
         <p:nvSpPr>
@@ -15473,6 +15901,10 @@
           </a:solidFill>
           <a:ln/>
         </p:spPr>
+        <p:txBody>
+          <a:bodyPr/>
+          <a:p/>
+        </p:txBody>
       </p:sp>
       <p:sp>
         <p:nvSpPr>
@@ -15493,6 +15925,10 @@
           </a:solidFill>
           <a:ln/>
         </p:spPr>
+        <p:txBody>
+          <a:bodyPr/>
+          <a:p/>
+        </p:txBody>
       </p:sp>
       <p:sp>
         <p:nvSpPr>
@@ -15520,6 +15956,10 @@
             <a:prstDash val="solid"/>
           </a:ln>
         </p:spPr>
+        <p:txBody>
+          <a:bodyPr/>
+          <a:p/>
+        </p:txBody>
       </p:sp>
       <p:sp>
         <p:nvSpPr>
@@ -15596,7 +16036,7 @@
                 <a:ea typeface="Calibri" pitchFamily="34" charset="-122"/>
                 <a:cs typeface="Calibri" pitchFamily="34" charset="-120"/>
               </a:rPr>
-              <a:t>Rural clinics are offline. Connectivity is the binding constraint.</a:t>
+              <a:t>Clinics are offline. Connectivity is the binding constraint.</a:t>
             </a:r>
             <a:endParaRPr lang="en-US" sz="1250" dirty="0"/>
           </a:p>
@@ -15623,6 +16063,10 @@
           </a:solidFill>
           <a:ln/>
         </p:spPr>
+        <p:txBody>
+          <a:bodyPr/>
+          <a:p/>
+        </p:txBody>
       </p:sp>
       <p:sp>
         <p:nvSpPr>
@@ -15699,7 +16143,7 @@
                 <a:ea typeface="Calibri" pitchFamily="34" charset="-122"/>
                 <a:cs typeface="Calibri" pitchFamily="34" charset="-120"/>
               </a:rPr>
-              <a:t>83.3% of rural households have internet access, against 91.6% urban — a real gap, but far smaller than we assumed.</a:t>
+              <a:t>Internet access now reaches a large majority of Indian households — the gap is far smaller than we assumed.</a:t>
             </a:r>
             <a:endParaRPr lang="en-US" sz="1250" dirty="0"/>
           </a:p>
@@ -15733,6 +16177,10 @@
             </a:outerShdw>
           </a:effectLst>
         </p:spPr>
+        <p:txBody>
+          <a:bodyPr/>
+          <a:p/>
+        </p:txBody>
       </p:sp>
       <p:sp>
         <p:nvSpPr>
@@ -15919,6 +16367,10 @@
             <a:prstDash val="solid"/>
           </a:ln>
         </p:spPr>
+        <p:txBody>
+          <a:bodyPr/>
+          <a:p/>
+        </p:txBody>
       </p:sp>
       <p:sp>
         <p:nvSpPr>
@@ -16022,6 +16474,10 @@
           </a:solidFill>
           <a:ln/>
         </p:spPr>
+        <p:txBody>
+          <a:bodyPr/>
+          <a:p/>
+        </p:txBody>
       </p:sp>
       <p:sp>
         <p:nvSpPr>
@@ -16132,6 +16588,10 @@
             </a:outerShdw>
           </a:effectLst>
         </p:spPr>
+        <p:txBody>
+          <a:bodyPr/>
+          <a:p/>
+        </p:txBody>
       </p:sp>
       <p:sp>
         <p:nvSpPr>
@@ -16790,7 +17250,7 @@
                 <a:ea typeface="Calibri" pitchFamily="34" charset="-122"/>
                 <a:cs typeface="Calibri" pitchFamily="34" charset="-120"/>
               </a:rPr>
-              <a:t>Solo practitioner · rural India</a:t>
+              <a:t>Practitioner running his own clinic</a:t>
             </a:r>
             <a:endParaRPr lang="en-US" sz="1250" dirty="0"/>
           </a:p>
@@ -17442,6 +17902,10 @@
             <a:prstDash val="solid"/>
           </a:ln>
         </p:spPr>
+        <p:txBody>
+          <a:bodyPr/>
+          <a:p/>
+        </p:txBody>
       </p:sp>
       <p:sp>
         <p:nvSpPr>
@@ -17579,6 +18043,10 @@
           </a:solidFill>
           <a:ln/>
         </p:spPr>
+        <p:txBody>
+          <a:bodyPr/>
+          <a:p/>
+        </p:txBody>
       </p:sp>
       <p:sp>
         <p:nvSpPr>
@@ -17599,6 +18067,10 @@
           </a:solidFill>
           <a:ln/>
         </p:spPr>
+        <p:txBody>
+          <a:bodyPr/>
+          <a:p/>
+        </p:txBody>
       </p:sp>
       <p:sp>
         <p:nvSpPr>
@@ -17619,6 +18091,10 @@
           </a:solidFill>
           <a:ln/>
         </p:spPr>
+        <p:txBody>
+          <a:bodyPr/>
+          <a:p/>
+        </p:txBody>
       </p:sp>
       <p:sp>
         <p:nvSpPr>
@@ -17639,6 +18115,10 @@
           </a:solidFill>
           <a:ln/>
         </p:spPr>
+        <p:txBody>
+          <a:bodyPr/>
+          <a:p/>
+        </p:txBody>
       </p:sp>
       <p:sp>
         <p:nvSpPr>
@@ -17659,6 +18139,10 @@
           </a:solidFill>
           <a:ln/>
         </p:spPr>
+        <p:txBody>
+          <a:bodyPr/>
+          <a:p/>
+        </p:txBody>
       </p:sp>
       <p:sp>
         <p:nvSpPr>
@@ -17681,6 +18165,10 @@
           </a:solidFill>
           <a:ln/>
         </p:spPr>
+        <p:txBody>
+          <a:bodyPr/>
+          <a:p/>
+        </p:txBody>
       </p:sp>
       <p:sp>
         <p:nvSpPr>
@@ -17802,6 +18290,10 @@
           </a:solidFill>
           <a:ln/>
         </p:spPr>
+        <p:txBody>
+          <a:bodyPr/>
+          <a:p/>
+        </p:txBody>
       </p:sp>
       <p:sp>
         <p:nvSpPr>
@@ -17824,6 +18316,10 @@
           </a:solidFill>
           <a:ln/>
         </p:spPr>
+        <p:txBody>
+          <a:bodyPr/>
+          <a:p/>
+        </p:txBody>
       </p:sp>
       <p:sp>
         <p:nvSpPr>
@@ -17945,6 +18441,10 @@
           </a:solidFill>
           <a:ln/>
         </p:spPr>
+        <p:txBody>
+          <a:bodyPr/>
+          <a:p/>
+        </p:txBody>
       </p:sp>
       <p:sp>
         <p:nvSpPr>
@@ -17967,6 +18467,10 @@
           </a:solidFill>
           <a:ln/>
         </p:spPr>
+        <p:txBody>
+          <a:bodyPr/>
+          <a:p/>
+        </p:txBody>
       </p:sp>
       <p:sp>
         <p:nvSpPr>
@@ -18068,6 +18572,10 @@
           </a:solidFill>
           <a:ln/>
         </p:spPr>
+        <p:txBody>
+          <a:bodyPr/>
+          <a:p/>
+        </p:txBody>
       </p:sp>
       <p:sp>
         <p:nvSpPr>
@@ -18090,6 +18598,10 @@
           </a:solidFill>
           <a:ln/>
         </p:spPr>
+        <p:txBody>
+          <a:bodyPr/>
+          <a:p/>
+        </p:txBody>
       </p:sp>
       <p:sp>
         <p:nvSpPr>
@@ -18211,6 +18723,10 @@
           </a:solidFill>
           <a:ln/>
         </p:spPr>
+        <p:txBody>
+          <a:bodyPr/>
+          <a:p/>
+        </p:txBody>
       </p:sp>
       <p:sp>
         <p:nvSpPr>
@@ -18233,6 +18749,10 @@
           </a:solidFill>
           <a:ln/>
         </p:spPr>
+        <p:txBody>
+          <a:bodyPr/>
+          <a:p/>
+        </p:txBody>
       </p:sp>
       <p:sp>
         <p:nvSpPr>
@@ -18354,6 +18874,10 @@
           </a:solidFill>
           <a:ln/>
         </p:spPr>
+        <p:txBody>
+          <a:bodyPr/>
+          <a:p/>
+        </p:txBody>
       </p:sp>
       <p:sp>
         <p:nvSpPr>
@@ -18376,6 +18900,10 @@
           </a:solidFill>
           <a:ln/>
         </p:spPr>
+        <p:txBody>
+          <a:bodyPr/>
+          <a:p/>
+        </p:txBody>
       </p:sp>
       <p:sp>
         <p:nvSpPr>
@@ -18497,6 +19025,10 @@
           </a:solidFill>
           <a:ln/>
         </p:spPr>
+        <p:txBody>
+          <a:bodyPr/>
+          <a:p/>
+        </p:txBody>
       </p:sp>
       <p:sp>
         <p:nvSpPr>
@@ -18559,6 +19091,10 @@
             <a:prstDash val="solid"/>
           </a:ln>
         </p:spPr>
+        <p:txBody>
+          <a:bodyPr/>
+          <a:p/>
+        </p:txBody>
       </p:sp>
       <p:sp>
         <p:nvSpPr>
@@ -18627,6 +19163,10 @@
             </a:outerShdw>
           </a:effectLst>
         </p:spPr>
+        <p:txBody>
+          <a:bodyPr/>
+          <a:p/>
+        </p:txBody>
       </p:sp>
       <p:sp>
         <p:nvSpPr>
@@ -18758,6 +19298,10 @@
             <a:prstDash val="solid"/>
           </a:ln>
         </p:spPr>
+        <p:txBody>
+          <a:bodyPr/>
+          <a:p/>
+        </p:txBody>
       </p:sp>
       <p:sp>
         <p:nvSpPr>
@@ -18895,6 +19439,10 @@
           </a:solidFill>
           <a:ln/>
         </p:spPr>
+        <p:txBody>
+          <a:bodyPr/>
+          <a:p/>
+        </p:txBody>
       </p:sp>
       <p:sp>
         <p:nvSpPr>
@@ -18915,6 +19463,10 @@
           </a:solidFill>
           <a:ln/>
         </p:spPr>
+        <p:txBody>
+          <a:bodyPr/>
+          <a:p/>
+        </p:txBody>
       </p:sp>
       <p:sp>
         <p:nvSpPr>
@@ -18935,6 +19487,10 @@
           </a:solidFill>
           <a:ln/>
         </p:spPr>
+        <p:txBody>
+          <a:bodyPr/>
+          <a:p/>
+        </p:txBody>
       </p:sp>
       <p:sp>
         <p:nvSpPr>
@@ -18955,6 +19511,10 @@
           </a:solidFill>
           <a:ln/>
         </p:spPr>
+        <p:txBody>
+          <a:bodyPr/>
+          <a:p/>
+        </p:txBody>
       </p:sp>
       <p:sp>
         <p:nvSpPr>
@@ -18975,6 +19535,10 @@
           </a:solidFill>
           <a:ln/>
         </p:spPr>
+        <p:txBody>
+          <a:bodyPr/>
+          <a:p/>
+        </p:txBody>
       </p:sp>
       <p:sp>
         <p:nvSpPr>
@@ -19048,6 +19612,10 @@
             </a:outerShdw>
           </a:effectLst>
         </p:spPr>
+        <p:txBody>
+          <a:bodyPr/>
+          <a:p/>
+        </p:txBody>
       </p:sp>
       <p:sp>
         <p:nvSpPr>
@@ -19070,6 +19638,10 @@
           </a:solidFill>
           <a:ln/>
         </p:spPr>
+        <p:txBody>
+          <a:bodyPr/>
+          <a:p/>
+        </p:txBody>
       </p:sp>
       <p:sp>
         <p:nvSpPr>
@@ -19224,6 +19796,10 @@
             </a:outerShdw>
           </a:effectLst>
         </p:spPr>
+        <p:txBody>
+          <a:bodyPr/>
+          <a:p/>
+        </p:txBody>
       </p:sp>
       <p:sp>
         <p:nvSpPr>
@@ -19246,6 +19822,10 @@
           </a:solidFill>
           <a:ln/>
         </p:spPr>
+        <p:txBody>
+          <a:bodyPr/>
+          <a:p/>
+        </p:txBody>
       </p:sp>
       <p:sp>
         <p:nvSpPr>
@@ -19400,6 +19980,10 @@
             </a:outerShdw>
           </a:effectLst>
         </p:spPr>
+        <p:txBody>
+          <a:bodyPr/>
+          <a:p/>
+        </p:txBody>
       </p:sp>
       <p:sp>
         <p:nvSpPr>
@@ -19422,6 +20006,10 @@
           </a:solidFill>
           <a:ln/>
         </p:spPr>
+        <p:txBody>
+          <a:bodyPr/>
+          <a:p/>
+        </p:txBody>
       </p:sp>
       <p:sp>
         <p:nvSpPr>
@@ -19576,6 +20164,10 @@
             </a:outerShdw>
           </a:effectLst>
         </p:spPr>
+        <p:txBody>
+          <a:bodyPr/>
+          <a:p/>
+        </p:txBody>
       </p:sp>
       <p:sp>
         <p:nvSpPr>
@@ -19598,6 +20190,10 @@
           </a:solidFill>
           <a:ln/>
         </p:spPr>
+        <p:txBody>
+          <a:bodyPr/>
+          <a:p/>
+        </p:txBody>
       </p:sp>
       <p:sp>
         <p:nvSpPr>

--- a/artifacts/ClinicOS_DesignThinking_Deck.pptx
+++ b/artifacts/ClinicOS_DesignThinking_Deck.pptx
@@ -520,7 +520,7 @@
           <a:p>
             <a:r>
               <a:rPr lang="en-US" dirty="0"/>
-              <a:t>Introduce the setting in one line: a one-room clinic in Krishnanagar. This deck walks the five design-thinking stages in order, and each stage changed something about what we built.</a:t>
+              <a:t>Introduce the setting in one line: the outpatient consultation, starting with the single-doctor clinic and growing to hospitals and health systems. This deck walks the five design-thinking stages in order, and each stage changed something about what we built.</a:t>
             </a:r>
             <a:endParaRPr lang="en-US" dirty="0"/>
           </a:p>
@@ -5284,7 +5284,7 @@
                 <a:ea typeface="Calibri" pitchFamily="34" charset="-122"/>
                 <a:cs typeface="Calibri" pitchFamily="34" charset="-120"/>
               </a:rPr>
-              <a:t>Nothing identifiable leaves the machine</a:t>
+              <a:t>Data stays where the clinic chose</a:t>
             </a:r>
             <a:endParaRPr lang="en-US" sz="1300" dirty="0"/>
           </a:p>
@@ -5326,7 +5326,7 @@
                 <a:ea typeface="Calibri" pitchFamily="34" charset="-122"/>
                 <a:cs typeface="Calibri" pitchFamily="34" charset="-120"/>
               </a:rPr>
-              <a:t>no cloud, no upload, no exception</a:t>
+              <a:t>no telemetry, no sharing, no exception</a:t>
             </a:r>
             <a:endParaRPr lang="en-US" sz="1150" dirty="0"/>
           </a:p>
@@ -6379,7 +6379,7 @@
                 <a:ea typeface="Calibri" pitchFamily="34" charset="-122"/>
                 <a:cs typeface="Calibri" pitchFamily="34" charset="-120"/>
               </a:rPr>
-              <a:t>A cloud AI scribe</a:t>
+              <a:t>A scribe locked to one cloud</a:t>
             </a:r>
             <a:endParaRPr lang="en-US" sz="1450" dirty="0"/>
           </a:p>
@@ -6421,7 +6421,7 @@
                 <a:ea typeface="Calibri" pitchFamily="34" charset="-122"/>
                 <a:cs typeface="Calibri" pitchFamily="34" charset="-120"/>
               </a:rPr>
-              <a:t>Sends the most sensitive audio a clinic produces off the premises, and stops working when the link drops.</a:t>
+              <a:t>Gives the clinic no say over where its most sensitive audio goes, and stops working when the link drops.</a:t>
             </a:r>
             <a:endParaRPr lang="en-US" sz="1250" dirty="0"/>
           </a:p>
@@ -6556,7 +6556,7 @@
                 <a:ea typeface="Calibri" pitchFamily="34" charset="-122"/>
                 <a:cs typeface="Calibri" pitchFamily="34" charset="-120"/>
               </a:rPr>
-              <a:t>An on-device ambient scribe</a:t>
+              <a:t>An ambient scribe the clinic controls</a:t>
             </a:r>
             <a:endParaRPr lang="en-US" sz="1450" dirty="0"/>
           </a:p>
@@ -6598,7 +6598,7 @@
                 <a:ea typeface="Calibri" pitchFamily="34" charset="-122"/>
                 <a:cs typeface="Calibri" pitchFamily="34" charset="-120"/>
               </a:rPr>
-              <a:t>Listens to the consultation already happening, drafts the note locally, and asks the doctor only to review and sign.</a:t>
+              <a:t>Listens to the consultation already happening, drafts the note on the clinic's computer or a hosted service it chooses, and asks the doctor only to review and sign.</a:t>
             </a:r>
             <a:endParaRPr lang="en-US" sz="1250" dirty="0"/>
           </a:p>
@@ -8045,7 +8045,7 @@
                 <a:ea typeface="Calibri" pitchFamily="34" charset="-122"/>
                 <a:cs typeface="Calibri" pitchFamily="34" charset="-120"/>
               </a:rPr>
-              <a:t>Runs on an ordinary laptop with no internet connection and no account.</a:t>
+              <a:t>Runs online as a service, or on the clinic's own computer — even without internet.</a:t>
             </a:r>
             <a:endParaRPr lang="en-US" sz="1200" dirty="0"/>
           </a:p>
@@ -8246,7 +8246,7 @@
                 <a:ea typeface="Calibri" pitchFamily="34" charset="-122"/>
                 <a:cs typeface="Calibri" pitchFamily="34" charset="-120"/>
               </a:rPr>
-              <a:t>Audio never leaves the machine</a:t>
+              <a:t>Audio is deleted at signing</a:t>
             </a:r>
             <a:endParaRPr lang="en-US" sz="1350" dirty="0"/>
           </a:p>
